--- a/slides/Module_02_Core_Concepts.pptx
+++ b/slides/Module_02_Core_Concepts.pptx
@@ -2435,7 +2435,7 @@
     <p:bg>
       <p:bgPr>
         <a:solidFill>
-          <a:srgbClr val="F3F6F9"/>
+          <a:srgbClr val="1C3557"/>
         </a:solidFill>
       </p:bgPr>
     </p:bg>
@@ -2455,96 +2455,94 @@
       </p:grpSpPr>
       <p:sp>
         <p:nvSpPr>
-          <p:cNvPr id="2" name="Shape 0"/>
-          <p:cNvSpPr/>
-          <p:nvPr/>
-        </p:nvSpPr>
-        <p:spPr>
-          <a:xfrm>
-            <a:off x="0" y="0"/>
-            <a:ext cx="9144000" cy="749808"/>
-          </a:xfrm>
-          <a:prstGeom prst="rect">
-            <a:avLst/>
-          </a:prstGeom>
-          <a:solidFill>
-            <a:srgbClr val="1C3557"/>
-          </a:solidFill>
-          <a:ln/>
-        </p:spPr>
-      </p:sp>
-      <p:sp>
-        <p:nvSpPr>
-          <p:cNvPr id="3" name="Shape 1"/>
-          <p:cNvSpPr/>
-          <p:nvPr/>
-        </p:nvSpPr>
-        <p:spPr>
-          <a:xfrm>
-            <a:off x="0" y="0"/>
-            <a:ext cx="320040" cy="749808"/>
-          </a:xfrm>
-          <a:prstGeom prst="rect">
-            <a:avLst/>
-          </a:prstGeom>
-          <a:solidFill>
-            <a:srgbClr val="3A7E6E"/>
-          </a:solidFill>
-          <a:ln/>
-        </p:spPr>
-      </p:sp>
-      <p:sp>
-        <p:nvSpPr>
-          <p:cNvPr id="4" name="Text 2"/>
-          <p:cNvSpPr/>
-          <p:nvPr/>
-        </p:nvSpPr>
-        <p:spPr>
-          <a:xfrm>
-            <a:off x="457200" y="0"/>
-            <a:ext cx="8321040" cy="749808"/>
-          </a:xfrm>
-          <a:prstGeom prst="rect">
-            <a:avLst/>
-          </a:prstGeom>
-          <a:noFill/>
-          <a:ln/>
-        </p:spPr>
-        <p:txBody>
-          <a:bodyPr wrap="square" lIns="0" tIns="0" rIns="0" bIns="0" rtlCol="0" anchor="ctr"/>
-          <a:lstStyle/>
-          <a:p>
-            <a:pPr indent="0" marL="0">
-              <a:buNone/>
-            </a:pPr>
-            <a:r>
-              <a:rPr lang="en-US" sz="1200" b="1" spc="200" kern="0" dirty="0">
+          <p:cNvPr id="2" name="Text 0"/>
+          <p:cNvSpPr/>
+          <p:nvPr/>
+        </p:nvSpPr>
+        <p:spPr>
+          <a:xfrm>
+            <a:off x="365760" y="201168"/>
+            <a:ext cx="8229600" cy="411480"/>
+          </a:xfrm>
+          <a:prstGeom prst="rect">
+            <a:avLst/>
+          </a:prstGeom>
+          <a:noFill/>
+          <a:ln/>
+        </p:spPr>
+        <p:txBody>
+          <a:bodyPr wrap="square" lIns="0" tIns="0" rIns="0" bIns="0" rtlCol="0" anchor="ctr"/>
+          <a:lstStyle/>
+          <a:p>
+            <a:pPr indent="0" marL="0">
+              <a:buNone/>
+            </a:pPr>
+            <a:r>
+              <a:rPr lang="en-US" sz="1300" b="1" spc="300" kern="0" dirty="0">
+                <a:solidFill>
+                  <a:srgbClr val="5B8DB8"/>
+                </a:solidFill>
+              </a:rPr>
+              <a:t>MULTI-AGENT PATTERNS  ·  WITH CODING AGENT EXAMPLES</a:t>
+            </a:r>
+            <a:endParaRPr lang="en-US" sz="1300" dirty="0"/>
+          </a:p>
+        </p:txBody>
+      </p:sp>
+      <p:sp>
+        <p:nvSpPr>
+          <p:cNvPr id="3" name="Text 1"/>
+          <p:cNvSpPr/>
+          <p:nvPr/>
+        </p:nvSpPr>
+        <p:spPr>
+          <a:xfrm>
+            <a:off x="365760" y="658368"/>
+            <a:ext cx="8229600" cy="320040"/>
+          </a:xfrm>
+          <a:prstGeom prst="rect">
+            <a:avLst/>
+          </a:prstGeom>
+          <a:noFill/>
+          <a:ln/>
+        </p:spPr>
+        <p:txBody>
+          <a:bodyPr wrap="square" lIns="0" tIns="0" rIns="0" bIns="0" rtlCol="0" anchor="ctr"/>
+          <a:lstStyle/>
+          <a:p>
+            <a:pPr indent="0" marL="0">
+              <a:buNone/>
+            </a:pPr>
+            <a:r>
+              <a:rPr lang="en-US" sz="1300" i="1" dirty="0">
                 <a:solidFill>
                   <a:srgbClr val="FFFFFF"/>
                 </a:solidFill>
               </a:rPr>
-              <a:t>CASE STUDY  ·  SPOTIFY HONK  ·  MULTI-AGENT IN PRODUCTION</a:t>
-            </a:r>
-            <a:endParaRPr lang="en-US" sz="1200" dirty="0"/>
-          </a:p>
-        </p:txBody>
-      </p:sp>
-      <p:sp>
-        <p:nvSpPr>
-          <p:cNvPr id="5" name="Shape 3"/>
-          <p:cNvSpPr/>
-          <p:nvPr/>
-        </p:nvSpPr>
-        <p:spPr>
-          <a:xfrm>
-            <a:off x="320040" y="896112"/>
-            <a:ext cx="1572768" cy="1691640"/>
-          </a:xfrm>
-          <a:prstGeom prst="rect">
-            <a:avLst/>
-          </a:prstGeom>
-          <a:solidFill>
-            <a:srgbClr val="FFFFFF"/>
+              <a:t>Each pattern applies both inside Claude Code and in production agent systems</a:t>
+            </a:r>
+            <a:endParaRPr lang="en-US" sz="1300" dirty="0"/>
+          </a:p>
+        </p:txBody>
+      </p:sp>
+      <p:sp>
+        <p:nvSpPr>
+          <p:cNvPr id="4" name="Shape 2"/>
+          <p:cNvSpPr/>
+          <p:nvPr/>
+        </p:nvSpPr>
+        <p:spPr>
+          <a:xfrm>
+            <a:off x="320040" y="1078992"/>
+            <a:ext cx="4160520" cy="1783080"/>
+          </a:xfrm>
+          <a:prstGeom prst="rect">
+            <a:avLst/>
+          </a:prstGeom>
+          <a:solidFill>
+            <a:srgbClr val="2E5073">
+              <a:alpha val="80000"/>
+            </a:srgbClr>
           </a:solidFill>
           <a:ln/>
           <a:effectLst>
@@ -2558,23 +2556,61 @@
       </p:sp>
       <p:sp>
         <p:nvSpPr>
-          <p:cNvPr id="6" name="Shape 4"/>
-          <p:cNvSpPr/>
-          <p:nvPr/>
-        </p:nvSpPr>
-        <p:spPr>
-          <a:xfrm>
-            <a:off x="320040" y="896112"/>
-            <a:ext cx="1572768" cy="530352"/>
-          </a:xfrm>
-          <a:prstGeom prst="rect">
-            <a:avLst/>
-          </a:prstGeom>
-          <a:solidFill>
-            <a:srgbClr val="1C3557"/>
-          </a:solidFill>
-          <a:ln/>
-        </p:spPr>
+          <p:cNvPr id="5" name="Shape 3"/>
+          <p:cNvSpPr/>
+          <p:nvPr/>
+        </p:nvSpPr>
+        <p:spPr>
+          <a:xfrm>
+            <a:off x="320040" y="1078992"/>
+            <a:ext cx="502920" cy="1783080"/>
+          </a:xfrm>
+          <a:prstGeom prst="rect">
+            <a:avLst/>
+          </a:prstGeom>
+          <a:solidFill>
+            <a:srgbClr val="3A7DC9">
+              <a:alpha val="85000"/>
+            </a:srgbClr>
+          </a:solidFill>
+          <a:ln/>
+        </p:spPr>
+      </p:sp>
+      <p:sp>
+        <p:nvSpPr>
+          <p:cNvPr id="6" name="Text 4"/>
+          <p:cNvSpPr/>
+          <p:nvPr/>
+        </p:nvSpPr>
+        <p:spPr>
+          <a:xfrm>
+            <a:off x="320040" y="1078992"/>
+            <a:ext cx="502920" cy="1783080"/>
+          </a:xfrm>
+          <a:prstGeom prst="rect">
+            <a:avLst/>
+          </a:prstGeom>
+          <a:noFill/>
+          <a:ln/>
+        </p:spPr>
+        <p:txBody>
+          <a:bodyPr wrap="square" lIns="0" tIns="0" rIns="0" bIns="0" rtlCol="0" anchor="ctr"/>
+          <a:lstStyle/>
+          <a:p>
+            <a:pPr algn="ctr" indent="0" marL="0">
+              <a:buNone/>
+            </a:pPr>
+            <a:r>
+              <a:rPr lang="en-US" sz="1800" b="1" dirty="0">
+                <a:solidFill>
+                  <a:srgbClr val="FFFFFF"/>
+                </a:solidFill>
+              </a:rPr>
+              <a:t>01</a:t>
+            </a:r>
+            <a:endParaRPr lang="en-US" sz="1800" dirty="0"/>
+          </a:p>
+        </p:txBody>
       </p:sp>
       <p:sp>
         <p:nvSpPr>
@@ -2584,136 +2620,146 @@
         </p:nvSpPr>
         <p:spPr>
           <a:xfrm>
-            <a:off x="320040" y="896112"/>
-            <a:ext cx="1572768" cy="530352"/>
-          </a:xfrm>
-          <a:prstGeom prst="rect">
-            <a:avLst/>
-          </a:prstGeom>
-          <a:noFill/>
-          <a:ln/>
-        </p:spPr>
-        <p:txBody>
-          <a:bodyPr wrap="square" lIns="0" tIns="0" rIns="0" bIns="0" rtlCol="0" anchor="ctr"/>
-          <a:lstStyle/>
-          <a:p>
-            <a:pPr algn="ctr" indent="0" marL="0">
-              <a:buNone/>
-            </a:pPr>
-            <a:r>
-              <a:rPr lang="en-US" sz="1100" b="1" dirty="0">
+            <a:off x="914400" y="1170432"/>
+            <a:ext cx="3474720" cy="329184"/>
+          </a:xfrm>
+          <a:prstGeom prst="rect">
+            <a:avLst/>
+          </a:prstGeom>
+          <a:noFill/>
+          <a:ln/>
+        </p:spPr>
+        <p:txBody>
+          <a:bodyPr wrap="square" lIns="0" tIns="0" rIns="0" bIns="0" rtlCol="0" anchor="ctr"/>
+          <a:lstStyle/>
+          <a:p>
+            <a:pPr indent="0" marL="0">
+              <a:buNone/>
+            </a:pPr>
+            <a:r>
+              <a:rPr lang="en-US" sz="1300" b="1" dirty="0">
+                <a:solidFill>
+                  <a:srgbClr val="3A7DC9"/>
+                </a:solidFill>
+              </a:rPr>
+              <a:t>Sequential Pipeline</a:t>
+            </a:r>
+            <a:endParaRPr lang="en-US" sz="1300" dirty="0"/>
+          </a:p>
+        </p:txBody>
+      </p:sp>
+      <p:sp>
+        <p:nvSpPr>
+          <p:cNvPr id="8" name="Text 6"/>
+          <p:cNvSpPr/>
+          <p:nvPr/>
+        </p:nvSpPr>
+        <p:spPr>
+          <a:xfrm>
+            <a:off x="914400" y="1517904"/>
+            <a:ext cx="3474720" cy="566928"/>
+          </a:xfrm>
+          <a:prstGeom prst="rect">
+            <a:avLst/>
+          </a:prstGeom>
+          <a:noFill/>
+          <a:ln/>
+        </p:spPr>
+        <p:txBody>
+          <a:bodyPr wrap="square" lIns="0" tIns="0" rIns="0" bIns="0" rtlCol="0" anchor="ctr"/>
+          <a:lstStyle/>
+          <a:p>
+            <a:pPr indent="0" marL="0">
+              <a:buNone/>
+            </a:pPr>
+            <a:r>
+              <a:rPr lang="en-US" sz="1050" dirty="0">
+                <a:solidFill>
+                  <a:srgbClr val="D4E4F0"/>
+                </a:solidFill>
+              </a:rPr>
+              <a:t>Each agent's output is the next agent's input. Simple and debuggable. Use when tasks have clear sequential dependencies.</a:t>
+            </a:r>
+            <a:endParaRPr lang="en-US" sz="1050" dirty="0"/>
+          </a:p>
+        </p:txBody>
+      </p:sp>
+      <p:sp>
+        <p:nvSpPr>
+          <p:cNvPr id="9" name="Shape 7"/>
+          <p:cNvSpPr/>
+          <p:nvPr/>
+        </p:nvSpPr>
+        <p:spPr>
+          <a:xfrm>
+            <a:off x="914400" y="2139696"/>
+            <a:ext cx="3474720" cy="621792"/>
+          </a:xfrm>
+          <a:prstGeom prst="rect">
+            <a:avLst/>
+          </a:prstGeom>
+          <a:solidFill>
+            <a:srgbClr val="3A7DC9">
+              <a:alpha val="25000"/>
+            </a:srgbClr>
+          </a:solidFill>
+          <a:ln/>
+        </p:spPr>
+      </p:sp>
+      <p:sp>
+        <p:nvSpPr>
+          <p:cNvPr id="10" name="Text 8"/>
+          <p:cNvSpPr/>
+          <p:nvPr/>
+        </p:nvSpPr>
+        <p:spPr>
+          <a:xfrm>
+            <a:off x="978408" y="2157984"/>
+            <a:ext cx="3383280" cy="585216"/>
+          </a:xfrm>
+          <a:prstGeom prst="rect">
+            <a:avLst/>
+          </a:prstGeom>
+          <a:noFill/>
+          <a:ln/>
+        </p:spPr>
+        <p:txBody>
+          <a:bodyPr wrap="square" lIns="0" tIns="0" rIns="0" bIns="0" rtlCol="0" anchor="ctr"/>
+          <a:lstStyle/>
+          <a:p>
+            <a:pPr indent="0" marL="0">
+              <a:buNone/>
+            </a:pPr>
+            <a:r>
+              <a:rPr lang="en-US" sz="950" i="1" dirty="0">
                 <a:solidFill>
                   <a:srgbClr val="FFFFFF"/>
                 </a:solidFill>
               </a:rPr>
-              <a:t>Engineer</a:t>
-            </a:r>
-            <a:endParaRPr lang="en-US" sz="1100" dirty="0"/>
-          </a:p>
-          <a:p>
-            <a:pPr algn="ctr" indent="0" marL="0">
-              <a:buNone/>
-            </a:pPr>
-            <a:r>
-              <a:rPr lang="en-US" sz="1100" b="1" dirty="0">
-                <a:solidFill>
-                  <a:srgbClr val="FFFFFF"/>
-                </a:solidFill>
-              </a:rPr>
-              <a:t>(Slack / mobile)</a:t>
-            </a:r>
-            <a:endParaRPr lang="en-US" sz="1100" dirty="0"/>
-          </a:p>
-        </p:txBody>
-      </p:sp>
-      <p:sp>
-        <p:nvSpPr>
-          <p:cNvPr id="8" name="Text 6"/>
-          <p:cNvSpPr/>
-          <p:nvPr/>
-        </p:nvSpPr>
-        <p:spPr>
-          <a:xfrm>
-            <a:off x="411480" y="1490472"/>
-            <a:ext cx="1389888" cy="960120"/>
-          </a:xfrm>
-          <a:prstGeom prst="rect">
-            <a:avLst/>
-          </a:prstGeom>
-          <a:noFill/>
-          <a:ln/>
-        </p:spPr>
-        <p:txBody>
-          <a:bodyPr wrap="square" lIns="0" tIns="0" rIns="0" bIns="0" rtlCol="0" anchor="ctr"/>
-          <a:lstStyle/>
-          <a:p>
-            <a:pPr algn="ctr" indent="0" marL="0">
-              <a:buNone/>
-            </a:pPr>
-            <a:r>
-              <a:rPr lang="en-US" sz="1000" dirty="0">
-                <a:solidFill>
-                  <a:srgbClr val="7A90A8"/>
-                </a:solidFill>
-              </a:rPr>
-              <a:t>Natural language intent</a:t>
-            </a:r>
-            <a:endParaRPr lang="en-US" sz="1000" dirty="0"/>
-          </a:p>
-        </p:txBody>
-      </p:sp>
-      <p:sp>
-        <p:nvSpPr>
-          <p:cNvPr id="9" name="Text 7"/>
-          <p:cNvSpPr/>
-          <p:nvPr/>
-        </p:nvSpPr>
-        <p:spPr>
-          <a:xfrm>
-            <a:off x="1892808" y="1536192"/>
-            <a:ext cx="146304" cy="411480"/>
-          </a:xfrm>
-          <a:prstGeom prst="rect">
-            <a:avLst/>
-          </a:prstGeom>
-          <a:noFill/>
-          <a:ln/>
-        </p:spPr>
-        <p:txBody>
-          <a:bodyPr wrap="square" lIns="0" tIns="0" rIns="0" bIns="0" rtlCol="0" anchor="ctr"/>
-          <a:lstStyle/>
-          <a:p>
-            <a:pPr algn="ctr" indent="0" marL="0">
-              <a:buNone/>
-            </a:pPr>
-            <a:r>
-              <a:rPr lang="en-US" sz="1800" dirty="0">
-                <a:solidFill>
-                  <a:srgbClr val="7A90A8"/>
-                </a:solidFill>
-              </a:rPr>
-              <a:t>→</a:t>
-            </a:r>
-            <a:endParaRPr lang="en-US" sz="1800" dirty="0"/>
-          </a:p>
-        </p:txBody>
-      </p:sp>
-      <p:sp>
-        <p:nvSpPr>
-          <p:cNvPr id="10" name="Shape 8"/>
-          <p:cNvSpPr/>
-          <p:nvPr/>
-        </p:nvSpPr>
-        <p:spPr>
-          <a:xfrm>
-            <a:off x="2039112" y="896112"/>
-            <a:ext cx="1572768" cy="1691640"/>
-          </a:xfrm>
-          <a:prstGeom prst="rect">
-            <a:avLst/>
-          </a:prstGeom>
-          <a:solidFill>
-            <a:srgbClr val="FFFFFF"/>
+              <a:t>Claude Code / Copilot: Claude Code: reads spec → writes tests → writes code → runs tests → opens PR. Each step feeds the next.</a:t>
+            </a:r>
+            <a:endParaRPr lang="en-US" sz="950" dirty="0"/>
+          </a:p>
+        </p:txBody>
+      </p:sp>
+      <p:sp>
+        <p:nvSpPr>
+          <p:cNvPr id="11" name="Shape 9"/>
+          <p:cNvSpPr/>
+          <p:nvPr/>
+        </p:nvSpPr>
+        <p:spPr>
+          <a:xfrm>
+            <a:off x="4709160" y="1078992"/>
+            <a:ext cx="4160520" cy="1783080"/>
+          </a:xfrm>
+          <a:prstGeom prst="rect">
+            <a:avLst/>
+          </a:prstGeom>
+          <a:solidFill>
+            <a:srgbClr val="2E5073">
+              <a:alpha val="80000"/>
+            </a:srgbClr>
           </a:solidFill>
           <a:ln/>
           <a:effectLst>
@@ -2727,34 +2773,36 @@
       </p:sp>
       <p:sp>
         <p:nvSpPr>
-          <p:cNvPr id="11" name="Shape 9"/>
-          <p:cNvSpPr/>
-          <p:nvPr/>
-        </p:nvSpPr>
-        <p:spPr>
-          <a:xfrm>
-            <a:off x="2039112" y="896112"/>
-            <a:ext cx="1572768" cy="530352"/>
-          </a:xfrm>
-          <a:prstGeom prst="rect">
-            <a:avLst/>
-          </a:prstGeom>
-          <a:solidFill>
-            <a:srgbClr val="4A7FA8"/>
-          </a:solidFill>
-          <a:ln/>
-        </p:spPr>
-      </p:sp>
-      <p:sp>
-        <p:nvSpPr>
-          <p:cNvPr id="12" name="Text 10"/>
-          <p:cNvSpPr/>
-          <p:nvPr/>
-        </p:nvSpPr>
-        <p:spPr>
-          <a:xfrm>
-            <a:off x="2039112" y="896112"/>
-            <a:ext cx="1572768" cy="530352"/>
+          <p:cNvPr id="12" name="Shape 10"/>
+          <p:cNvSpPr/>
+          <p:nvPr/>
+        </p:nvSpPr>
+        <p:spPr>
+          <a:xfrm>
+            <a:off x="4709160" y="1078992"/>
+            <a:ext cx="502920" cy="1783080"/>
+          </a:xfrm>
+          <a:prstGeom prst="rect">
+            <a:avLst/>
+          </a:prstGeom>
+          <a:solidFill>
+            <a:srgbClr val="4A7FA8">
+              <a:alpha val="85000"/>
+            </a:srgbClr>
+          </a:solidFill>
+          <a:ln/>
+        </p:spPr>
+      </p:sp>
+      <p:sp>
+        <p:nvSpPr>
+          <p:cNvPr id="13" name="Text 11"/>
+          <p:cNvSpPr/>
+          <p:nvPr/>
+        </p:nvSpPr>
+        <p:spPr>
+          <a:xfrm>
+            <a:off x="4709160" y="1078992"/>
+            <a:ext cx="502920" cy="1783080"/>
           </a:xfrm>
           <a:prstGeom prst="rect">
             <a:avLst/>
@@ -2770,119 +2818,165 @@
               <a:buNone/>
             </a:pPr>
             <a:r>
-              <a:rPr lang="en-US" sz="1100" b="1" dirty="0">
+              <a:rPr lang="en-US" sz="1800" b="1" dirty="0">
                 <a:solidFill>
                   <a:srgbClr val="FFFFFF"/>
                 </a:solidFill>
               </a:rPr>
-              <a:t>Interactive</a:t>
-            </a:r>
-            <a:endParaRPr lang="en-US" sz="1100" dirty="0"/>
-          </a:p>
-          <a:p>
-            <a:pPr algn="ctr" indent="0" marL="0">
-              <a:buNone/>
-            </a:pPr>
-            <a:r>
-              <a:rPr lang="en-US" sz="1100" b="1" dirty="0">
+              <a:t>02</a:t>
+            </a:r>
+            <a:endParaRPr lang="en-US" sz="1800" dirty="0"/>
+          </a:p>
+        </p:txBody>
+      </p:sp>
+      <p:sp>
+        <p:nvSpPr>
+          <p:cNvPr id="14" name="Text 12"/>
+          <p:cNvSpPr/>
+          <p:nvPr/>
+        </p:nvSpPr>
+        <p:spPr>
+          <a:xfrm>
+            <a:off x="5303520" y="1170432"/>
+            <a:ext cx="3474720" cy="329184"/>
+          </a:xfrm>
+          <a:prstGeom prst="rect">
+            <a:avLst/>
+          </a:prstGeom>
+          <a:noFill/>
+          <a:ln/>
+        </p:spPr>
+        <p:txBody>
+          <a:bodyPr wrap="square" lIns="0" tIns="0" rIns="0" bIns="0" rtlCol="0" anchor="ctr"/>
+          <a:lstStyle/>
+          <a:p>
+            <a:pPr indent="0" marL="0">
+              <a:buNone/>
+            </a:pPr>
+            <a:r>
+              <a:rPr lang="en-US" sz="1300" b="1" dirty="0">
+                <a:solidFill>
+                  <a:srgbClr val="4A7FA8"/>
+                </a:solidFill>
+              </a:rPr>
+              <a:t>Parallel Fan-Out</a:t>
+            </a:r>
+            <a:endParaRPr lang="en-US" sz="1300" dirty="0"/>
+          </a:p>
+        </p:txBody>
+      </p:sp>
+      <p:sp>
+        <p:nvSpPr>
+          <p:cNvPr id="15" name="Text 13"/>
+          <p:cNvSpPr/>
+          <p:nvPr/>
+        </p:nvSpPr>
+        <p:spPr>
+          <a:xfrm>
+            <a:off x="5303520" y="1517904"/>
+            <a:ext cx="3474720" cy="566928"/>
+          </a:xfrm>
+          <a:prstGeom prst="rect">
+            <a:avLst/>
+          </a:prstGeom>
+          <a:noFill/>
+          <a:ln/>
+        </p:spPr>
+        <p:txBody>
+          <a:bodyPr wrap="square" lIns="0" tIns="0" rIns="0" bIns="0" rtlCol="0" anchor="ctr"/>
+          <a:lstStyle/>
+          <a:p>
+            <a:pPr indent="0" marL="0">
+              <a:buNone/>
+            </a:pPr>
+            <a:r>
+              <a:rPr lang="en-US" sz="1050" dirty="0">
+                <a:solidFill>
+                  <a:srgbClr val="D4E4F0"/>
+                </a:solidFill>
+              </a:rPr>
+              <a:t>Parallelise independent subtasks. Reduces wall-clock time for research or analysis. Use when subtasks are independent.</a:t>
+            </a:r>
+            <a:endParaRPr lang="en-US" sz="1050" dirty="0"/>
+          </a:p>
+        </p:txBody>
+      </p:sp>
+      <p:sp>
+        <p:nvSpPr>
+          <p:cNvPr id="16" name="Shape 14"/>
+          <p:cNvSpPr/>
+          <p:nvPr/>
+        </p:nvSpPr>
+        <p:spPr>
+          <a:xfrm>
+            <a:off x="5303520" y="2139696"/>
+            <a:ext cx="3474720" cy="621792"/>
+          </a:xfrm>
+          <a:prstGeom prst="rect">
+            <a:avLst/>
+          </a:prstGeom>
+          <a:solidFill>
+            <a:srgbClr val="4A7FA8">
+              <a:alpha val="25000"/>
+            </a:srgbClr>
+          </a:solidFill>
+          <a:ln/>
+        </p:spPr>
+      </p:sp>
+      <p:sp>
+        <p:nvSpPr>
+          <p:cNvPr id="17" name="Text 15"/>
+          <p:cNvSpPr/>
+          <p:nvPr/>
+        </p:nvSpPr>
+        <p:spPr>
+          <a:xfrm>
+            <a:off x="5367528" y="2157984"/>
+            <a:ext cx="3383280" cy="585216"/>
+          </a:xfrm>
+          <a:prstGeom prst="rect">
+            <a:avLst/>
+          </a:prstGeom>
+          <a:noFill/>
+          <a:ln/>
+        </p:spPr>
+        <p:txBody>
+          <a:bodyPr wrap="square" lIns="0" tIns="0" rIns="0" bIns="0" rtlCol="0" anchor="ctr"/>
+          <a:lstStyle/>
+          <a:p>
+            <a:pPr indent="0" marL="0">
+              <a:buNone/>
+            </a:pPr>
+            <a:r>
+              <a:rPr lang="en-US" sz="950" i="1" dirty="0">
                 <a:solidFill>
                   <a:srgbClr val="FFFFFF"/>
                 </a:solidFill>
               </a:rPr>
-              <a:t>Agent</a:t>
-            </a:r>
-            <a:endParaRPr lang="en-US" sz="1100" dirty="0"/>
-          </a:p>
-        </p:txBody>
-      </p:sp>
-      <p:sp>
-        <p:nvSpPr>
-          <p:cNvPr id="13" name="Text 11"/>
-          <p:cNvSpPr/>
-          <p:nvPr/>
-        </p:nvSpPr>
-        <p:spPr>
-          <a:xfrm>
-            <a:off x="2130552" y="1490472"/>
-            <a:ext cx="1389888" cy="960120"/>
-          </a:xfrm>
-          <a:prstGeom prst="rect">
-            <a:avLst/>
-          </a:prstGeom>
-          <a:noFill/>
-          <a:ln/>
-        </p:spPr>
-        <p:txBody>
-          <a:bodyPr wrap="square" lIns="0" tIns="0" rIns="0" bIns="0" rtlCol="0" anchor="ctr"/>
-          <a:lstStyle/>
-          <a:p>
-            <a:pPr algn="ctr" indent="0" marL="0">
-              <a:buNone/>
-            </a:pPr>
-            <a:r>
-              <a:rPr lang="en-US" sz="1000" dirty="0">
-                <a:solidFill>
-                  <a:srgbClr val="7A90A8"/>
-                </a:solidFill>
-              </a:rPr>
-              <a:t>Gathers context → structured prompt</a:t>
-            </a:r>
-            <a:endParaRPr lang="en-US" sz="1000" dirty="0"/>
-          </a:p>
-        </p:txBody>
-      </p:sp>
-      <p:sp>
-        <p:nvSpPr>
-          <p:cNvPr id="14" name="Text 12"/>
-          <p:cNvSpPr/>
-          <p:nvPr/>
-        </p:nvSpPr>
-        <p:spPr>
-          <a:xfrm>
-            <a:off x="3611880" y="1536192"/>
-            <a:ext cx="146304" cy="411480"/>
-          </a:xfrm>
-          <a:prstGeom prst="rect">
-            <a:avLst/>
-          </a:prstGeom>
-          <a:noFill/>
-          <a:ln/>
-        </p:spPr>
-        <p:txBody>
-          <a:bodyPr wrap="square" lIns="0" tIns="0" rIns="0" bIns="0" rtlCol="0" anchor="ctr"/>
-          <a:lstStyle/>
-          <a:p>
-            <a:pPr algn="ctr" indent="0" marL="0">
-              <a:buNone/>
-            </a:pPr>
-            <a:r>
-              <a:rPr lang="en-US" sz="1800" dirty="0">
-                <a:solidFill>
-                  <a:srgbClr val="7A90A8"/>
-                </a:solidFill>
-              </a:rPr>
-              <a:t>→</a:t>
-            </a:r>
-            <a:endParaRPr lang="en-US" sz="1800" dirty="0"/>
-          </a:p>
-        </p:txBody>
-      </p:sp>
-      <p:sp>
-        <p:nvSpPr>
-          <p:cNvPr id="15" name="Shape 13"/>
-          <p:cNvSpPr/>
-          <p:nvPr/>
-        </p:nvSpPr>
-        <p:spPr>
-          <a:xfrm>
-            <a:off x="3758184" y="896112"/>
-            <a:ext cx="1572768" cy="1691640"/>
-          </a:xfrm>
-          <a:prstGeom prst="rect">
-            <a:avLst/>
-          </a:prstGeom>
-          <a:solidFill>
-            <a:srgbClr val="FFFFFF"/>
+              <a:t>Claude Code / Copilot: Claude Code simultaneously searches multiple codebase areas before synthesising an implementation plan.</a:t>
+            </a:r>
+            <a:endParaRPr lang="en-US" sz="950" dirty="0"/>
+          </a:p>
+        </p:txBody>
+      </p:sp>
+      <p:sp>
+        <p:nvSpPr>
+          <p:cNvPr id="18" name="Shape 16"/>
+          <p:cNvSpPr/>
+          <p:nvPr/>
+        </p:nvSpPr>
+        <p:spPr>
+          <a:xfrm>
+            <a:off x="320040" y="2999232"/>
+            <a:ext cx="4160520" cy="1783080"/>
+          </a:xfrm>
+          <a:prstGeom prst="rect">
+            <a:avLst/>
+          </a:prstGeom>
+          <a:solidFill>
+            <a:srgbClr val="2E5073">
+              <a:alpha val="80000"/>
+            </a:srgbClr>
           </a:solidFill>
           <a:ln/>
           <a:effectLst>
@@ -2896,34 +2990,36 @@
       </p:sp>
       <p:sp>
         <p:nvSpPr>
-          <p:cNvPr id="16" name="Shape 14"/>
-          <p:cNvSpPr/>
-          <p:nvPr/>
-        </p:nvSpPr>
-        <p:spPr>
-          <a:xfrm>
-            <a:off x="3758184" y="896112"/>
-            <a:ext cx="1572768" cy="530352"/>
-          </a:xfrm>
-          <a:prstGeom prst="rect">
-            <a:avLst/>
-          </a:prstGeom>
-          <a:solidFill>
-            <a:srgbClr val="3A7DC9"/>
-          </a:solidFill>
-          <a:ln/>
-        </p:spPr>
-      </p:sp>
-      <p:sp>
-        <p:nvSpPr>
-          <p:cNvPr id="17" name="Text 15"/>
-          <p:cNvSpPr/>
-          <p:nvPr/>
-        </p:nvSpPr>
-        <p:spPr>
-          <a:xfrm>
-            <a:off x="3758184" y="896112"/>
-            <a:ext cx="1572768" cy="530352"/>
+          <p:cNvPr id="19" name="Shape 17"/>
+          <p:cNvSpPr/>
+          <p:nvPr/>
+        </p:nvSpPr>
+        <p:spPr>
+          <a:xfrm>
+            <a:off x="320040" y="2999232"/>
+            <a:ext cx="502920" cy="1783080"/>
+          </a:xfrm>
+          <a:prstGeom prst="rect">
+            <a:avLst/>
+          </a:prstGeom>
+          <a:solidFill>
+            <a:srgbClr val="3A7E6E">
+              <a:alpha val="85000"/>
+            </a:srgbClr>
+          </a:solidFill>
+          <a:ln/>
+        </p:spPr>
+      </p:sp>
+      <p:sp>
+        <p:nvSpPr>
+          <p:cNvPr id="20" name="Text 18"/>
+          <p:cNvSpPr/>
+          <p:nvPr/>
+        </p:nvSpPr>
+        <p:spPr>
+          <a:xfrm>
+            <a:off x="320040" y="2999232"/>
+            <a:ext cx="502920" cy="1783080"/>
           </a:xfrm>
           <a:prstGeom prst="rect">
             <a:avLst/>
@@ -2939,119 +3035,165 @@
               <a:buNone/>
             </a:pPr>
             <a:r>
-              <a:rPr lang="en-US" sz="1100" b="1" dirty="0">
+              <a:rPr lang="en-US" sz="1800" b="1" dirty="0">
                 <a:solidFill>
                   <a:srgbClr val="FFFFFF"/>
                 </a:solidFill>
               </a:rPr>
-              <a:t>Background</a:t>
-            </a:r>
-            <a:endParaRPr lang="en-US" sz="1100" dirty="0"/>
-          </a:p>
-          <a:p>
-            <a:pPr algn="ctr" indent="0" marL="0">
-              <a:buNone/>
-            </a:pPr>
-            <a:r>
-              <a:rPr lang="en-US" sz="1100" b="1" dirty="0">
+              <a:t>03</a:t>
+            </a:r>
+            <a:endParaRPr lang="en-US" sz="1800" dirty="0"/>
+          </a:p>
+        </p:txBody>
+      </p:sp>
+      <p:sp>
+        <p:nvSpPr>
+          <p:cNvPr id="21" name="Text 19"/>
+          <p:cNvSpPr/>
+          <p:nvPr/>
+        </p:nvSpPr>
+        <p:spPr>
+          <a:xfrm>
+            <a:off x="914400" y="3090672"/>
+            <a:ext cx="3474720" cy="329184"/>
+          </a:xfrm>
+          <a:prstGeom prst="rect">
+            <a:avLst/>
+          </a:prstGeom>
+          <a:noFill/>
+          <a:ln/>
+        </p:spPr>
+        <p:txBody>
+          <a:bodyPr wrap="square" lIns="0" tIns="0" rIns="0" bIns="0" rtlCol="0" anchor="ctr"/>
+          <a:lstStyle/>
+          <a:p>
+            <a:pPr indent="0" marL="0">
+              <a:buNone/>
+            </a:pPr>
+            <a:r>
+              <a:rPr lang="en-US" sz="1300" b="1" dirty="0">
+                <a:solidFill>
+                  <a:srgbClr val="3A7E6E"/>
+                </a:solidFill>
+              </a:rPr>
+              <a:t>Evaluator-Optimizer Loop</a:t>
+            </a:r>
+            <a:endParaRPr lang="en-US" sz="1300" dirty="0"/>
+          </a:p>
+        </p:txBody>
+      </p:sp>
+      <p:sp>
+        <p:nvSpPr>
+          <p:cNvPr id="22" name="Text 20"/>
+          <p:cNvSpPr/>
+          <p:nvPr/>
+        </p:nvSpPr>
+        <p:spPr>
+          <a:xfrm>
+            <a:off x="914400" y="3438144"/>
+            <a:ext cx="3474720" cy="566928"/>
+          </a:xfrm>
+          <a:prstGeom prst="rect">
+            <a:avLst/>
+          </a:prstGeom>
+          <a:noFill/>
+          <a:ln/>
+        </p:spPr>
+        <p:txBody>
+          <a:bodyPr wrap="square" lIns="0" tIns="0" rIns="0" bIns="0" rtlCol="0" anchor="ctr"/>
+          <a:lstStyle/>
+          <a:p>
+            <a:pPr indent="0" marL="0">
+              <a:buNone/>
+            </a:pPr>
+            <a:r>
+              <a:rPr lang="en-US" sz="1050" dirty="0">
+                <a:solidFill>
+                  <a:srgbClr val="D4E4F0"/>
+                </a:solidFill>
+              </a:rPr>
+              <a:t>An evaluator scores the generator's output and feeds back a critique. The generator revises until quality threshold is met.</a:t>
+            </a:r>
+            <a:endParaRPr lang="en-US" sz="1050" dirty="0"/>
+          </a:p>
+        </p:txBody>
+      </p:sp>
+      <p:sp>
+        <p:nvSpPr>
+          <p:cNvPr id="23" name="Shape 21"/>
+          <p:cNvSpPr/>
+          <p:nvPr/>
+        </p:nvSpPr>
+        <p:spPr>
+          <a:xfrm>
+            <a:off x="914400" y="4059936"/>
+            <a:ext cx="3474720" cy="621792"/>
+          </a:xfrm>
+          <a:prstGeom prst="rect">
+            <a:avLst/>
+          </a:prstGeom>
+          <a:solidFill>
+            <a:srgbClr val="3A7E6E">
+              <a:alpha val="25000"/>
+            </a:srgbClr>
+          </a:solidFill>
+          <a:ln/>
+        </p:spPr>
+      </p:sp>
+      <p:sp>
+        <p:nvSpPr>
+          <p:cNvPr id="24" name="Text 22"/>
+          <p:cNvSpPr/>
+          <p:nvPr/>
+        </p:nvSpPr>
+        <p:spPr>
+          <a:xfrm>
+            <a:off x="978408" y="4078224"/>
+            <a:ext cx="3383280" cy="585216"/>
+          </a:xfrm>
+          <a:prstGeom prst="rect">
+            <a:avLst/>
+          </a:prstGeom>
+          <a:noFill/>
+          <a:ln/>
+        </p:spPr>
+        <p:txBody>
+          <a:bodyPr wrap="square" lIns="0" tIns="0" rIns="0" bIns="0" rtlCol="0" anchor="ctr"/>
+          <a:lstStyle/>
+          <a:p>
+            <a:pPr indent="0" marL="0">
+              <a:buNone/>
+            </a:pPr>
+            <a:r>
+              <a:rPr lang="en-US" sz="950" i="1" dirty="0">
                 <a:solidFill>
                   <a:srgbClr val="FFFFFF"/>
                 </a:solidFill>
               </a:rPr>
-              <a:t>Coding Agent</a:t>
-            </a:r>
-            <a:endParaRPr lang="en-US" sz="1100" dirty="0"/>
-          </a:p>
-        </p:txBody>
-      </p:sp>
-      <p:sp>
-        <p:nvSpPr>
-          <p:cNvPr id="18" name="Text 16"/>
-          <p:cNvSpPr/>
-          <p:nvPr/>
-        </p:nvSpPr>
-        <p:spPr>
-          <a:xfrm>
-            <a:off x="3849624" y="1490472"/>
-            <a:ext cx="1389888" cy="960120"/>
-          </a:xfrm>
-          <a:prstGeom prst="rect">
-            <a:avLst/>
-          </a:prstGeom>
-          <a:noFill/>
-          <a:ln/>
-        </p:spPr>
-        <p:txBody>
-          <a:bodyPr wrap="square" lIns="0" tIns="0" rIns="0" bIns="0" rtlCol="0" anchor="ctr"/>
-          <a:lstStyle/>
-          <a:p>
-            <a:pPr algn="ctr" indent="0" marL="0">
-              <a:buNone/>
-            </a:pPr>
-            <a:r>
-              <a:rPr lang="en-US" sz="1000" dirty="0">
-                <a:solidFill>
-                  <a:srgbClr val="7A90A8"/>
-                </a:solidFill>
-              </a:rPr>
-              <a:t>Plans, implements, iterates</a:t>
-            </a:r>
-            <a:endParaRPr lang="en-US" sz="1000" dirty="0"/>
-          </a:p>
-        </p:txBody>
-      </p:sp>
-      <p:sp>
-        <p:nvSpPr>
-          <p:cNvPr id="19" name="Text 17"/>
-          <p:cNvSpPr/>
-          <p:nvPr/>
-        </p:nvSpPr>
-        <p:spPr>
-          <a:xfrm>
-            <a:off x="5330952" y="1536192"/>
-            <a:ext cx="146304" cy="411480"/>
-          </a:xfrm>
-          <a:prstGeom prst="rect">
-            <a:avLst/>
-          </a:prstGeom>
-          <a:noFill/>
-          <a:ln/>
-        </p:spPr>
-        <p:txBody>
-          <a:bodyPr wrap="square" lIns="0" tIns="0" rIns="0" bIns="0" rtlCol="0" anchor="ctr"/>
-          <a:lstStyle/>
-          <a:p>
-            <a:pPr algn="ctr" indent="0" marL="0">
-              <a:buNone/>
-            </a:pPr>
-            <a:r>
-              <a:rPr lang="en-US" sz="1800" dirty="0">
-                <a:solidFill>
-                  <a:srgbClr val="7A90A8"/>
-                </a:solidFill>
-              </a:rPr>
-              <a:t>→</a:t>
-            </a:r>
-            <a:endParaRPr lang="en-US" sz="1800" dirty="0"/>
-          </a:p>
-        </p:txBody>
-      </p:sp>
-      <p:sp>
-        <p:nvSpPr>
-          <p:cNvPr id="20" name="Shape 18"/>
-          <p:cNvSpPr/>
-          <p:nvPr/>
-        </p:nvSpPr>
-        <p:spPr>
-          <a:xfrm>
-            <a:off x="5477256" y="896112"/>
-            <a:ext cx="1572768" cy="1691640"/>
-          </a:xfrm>
-          <a:prstGeom prst="rect">
-            <a:avLst/>
-          </a:prstGeom>
-          <a:solidFill>
-            <a:srgbClr val="FFFFFF"/>
+              <a:t>Claude Code / Copilot: Claude Code writes a function, runs tests, reads failures, revises — autonomously — until tests pass.</a:t>
+            </a:r>
+            <a:endParaRPr lang="en-US" sz="950" dirty="0"/>
+          </a:p>
+        </p:txBody>
+      </p:sp>
+      <p:sp>
+        <p:nvSpPr>
+          <p:cNvPr id="25" name="Shape 23"/>
+          <p:cNvSpPr/>
+          <p:nvPr/>
+        </p:nvSpPr>
+        <p:spPr>
+          <a:xfrm>
+            <a:off x="4709160" y="2999232"/>
+            <a:ext cx="4160520" cy="1783080"/>
+          </a:xfrm>
+          <a:prstGeom prst="rect">
+            <a:avLst/>
+          </a:prstGeom>
+          <a:solidFill>
+            <a:srgbClr val="2E5073">
+              <a:alpha val="80000"/>
+            </a:srgbClr>
           </a:solidFill>
           <a:ln/>
           <a:effectLst>
@@ -3065,34 +3207,36 @@
       </p:sp>
       <p:sp>
         <p:nvSpPr>
-          <p:cNvPr id="21" name="Shape 19"/>
-          <p:cNvSpPr/>
-          <p:nvPr/>
-        </p:nvSpPr>
-        <p:spPr>
-          <a:xfrm>
-            <a:off x="5477256" y="896112"/>
-            <a:ext cx="1572768" cy="530352"/>
-          </a:xfrm>
-          <a:prstGeom prst="rect">
-            <a:avLst/>
-          </a:prstGeom>
-          <a:solidFill>
-            <a:srgbClr val="3A7E6E"/>
-          </a:solidFill>
-          <a:ln/>
-        </p:spPr>
-      </p:sp>
-      <p:sp>
-        <p:nvSpPr>
-          <p:cNvPr id="22" name="Text 20"/>
-          <p:cNvSpPr/>
-          <p:nvPr/>
-        </p:nvSpPr>
-        <p:spPr>
-          <a:xfrm>
-            <a:off x="5477256" y="896112"/>
-            <a:ext cx="1572768" cy="530352"/>
+          <p:cNvPr id="26" name="Shape 24"/>
+          <p:cNvSpPr/>
+          <p:nvPr/>
+        </p:nvSpPr>
+        <p:spPr>
+          <a:xfrm>
+            <a:off x="4709160" y="2999232"/>
+            <a:ext cx="502920" cy="1783080"/>
+          </a:xfrm>
+          <a:prstGeom prst="rect">
+            <a:avLst/>
+          </a:prstGeom>
+          <a:solidFill>
+            <a:srgbClr val="8096B0">
+              <a:alpha val="85000"/>
+            </a:srgbClr>
+          </a:solidFill>
+          <a:ln/>
+        </p:spPr>
+      </p:sp>
+      <p:sp>
+        <p:nvSpPr>
+          <p:cNvPr id="27" name="Text 25"/>
+          <p:cNvSpPr/>
+          <p:nvPr/>
+        </p:nvSpPr>
+        <p:spPr>
+          <a:xfrm>
+            <a:off x="4709160" y="2999232"/>
+            <a:ext cx="502920" cy="1783080"/>
           </a:xfrm>
           <a:prstGeom prst="rect">
             <a:avLst/>
@@ -3108,745 +3252,180 @@
               <a:buNone/>
             </a:pPr>
             <a:r>
-              <a:rPr lang="en-US" sz="1100" b="1" dirty="0">
+              <a:rPr lang="en-US" sz="1800" b="1" dirty="0">
                 <a:solidFill>
                   <a:srgbClr val="FFFFFF"/>
                 </a:solidFill>
               </a:rPr>
-              <a:t>Verifiers +</a:t>
-            </a:r>
-            <a:endParaRPr lang="en-US" sz="1100" dirty="0"/>
-          </a:p>
+              <a:t>04</a:t>
+            </a:r>
+            <a:endParaRPr lang="en-US" sz="1800" dirty="0"/>
+          </a:p>
+        </p:txBody>
+      </p:sp>
+      <p:sp>
+        <p:nvSpPr>
+          <p:cNvPr id="28" name="Text 26"/>
+          <p:cNvSpPr/>
+          <p:nvPr/>
+        </p:nvSpPr>
+        <p:spPr>
+          <a:xfrm>
+            <a:off x="5303520" y="3090672"/>
+            <a:ext cx="3474720" cy="329184"/>
+          </a:xfrm>
+          <a:prstGeom prst="rect">
+            <a:avLst/>
+          </a:prstGeom>
+          <a:noFill/>
+          <a:ln/>
+        </p:spPr>
+        <p:txBody>
+          <a:bodyPr wrap="square" lIns="0" tIns="0" rIns="0" bIns="0" rtlCol="0" anchor="ctr"/>
+          <a:lstStyle/>
+          <a:p>
+            <a:pPr indent="0" marL="0">
+              <a:buNone/>
+            </a:pPr>
+            <a:r>
+              <a:rPr lang="en-US" sz="1300" b="1" dirty="0">
+                <a:solidFill>
+                  <a:srgbClr val="8096B0"/>
+                </a:solidFill>
+              </a:rPr>
+              <a:t>Specialist Routing</a:t>
+            </a:r>
+            <a:endParaRPr lang="en-US" sz="1300" dirty="0"/>
+          </a:p>
+        </p:txBody>
+      </p:sp>
+      <p:sp>
+        <p:nvSpPr>
+          <p:cNvPr id="29" name="Text 27"/>
+          <p:cNvSpPr/>
+          <p:nvPr/>
+        </p:nvSpPr>
+        <p:spPr>
+          <a:xfrm>
+            <a:off x="5303520" y="3438144"/>
+            <a:ext cx="3474720" cy="566928"/>
+          </a:xfrm>
+          <a:prstGeom prst="rect">
+            <a:avLst/>
+          </a:prstGeom>
+          <a:noFill/>
+          <a:ln/>
+        </p:spPr>
+        <p:txBody>
+          <a:bodyPr wrap="square" lIns="0" tIns="0" rIns="0" bIns="0" rtlCol="0" anchor="ctr"/>
+          <a:lstStyle/>
+          <a:p>
+            <a:pPr indent="0" marL="0">
+              <a:buNone/>
+            </a:pPr>
+            <a:r>
+              <a:rPr lang="en-US" sz="1050" dirty="0">
+                <a:solidFill>
+                  <a:srgbClr val="D4E4F0"/>
+                </a:solidFill>
+              </a:rPr>
+              <a:t>A lightweight router examines the request and delegates to the right specialist agent for the job.</a:t>
+            </a:r>
+            <a:endParaRPr lang="en-US" sz="1050" dirty="0"/>
+          </a:p>
+        </p:txBody>
+      </p:sp>
+      <p:sp>
+        <p:nvSpPr>
+          <p:cNvPr id="30" name="Shape 28"/>
+          <p:cNvSpPr/>
+          <p:nvPr/>
+        </p:nvSpPr>
+        <p:spPr>
+          <a:xfrm>
+            <a:off x="5303520" y="4059936"/>
+            <a:ext cx="3474720" cy="621792"/>
+          </a:xfrm>
+          <a:prstGeom prst="rect">
+            <a:avLst/>
+          </a:prstGeom>
+          <a:solidFill>
+            <a:srgbClr val="8096B0">
+              <a:alpha val="25000"/>
+            </a:srgbClr>
+          </a:solidFill>
+          <a:ln/>
+        </p:spPr>
+      </p:sp>
+      <p:sp>
+        <p:nvSpPr>
+          <p:cNvPr id="31" name="Text 29"/>
+          <p:cNvSpPr/>
+          <p:nvPr/>
+        </p:nvSpPr>
+        <p:spPr>
+          <a:xfrm>
+            <a:off x="5367528" y="4078224"/>
+            <a:ext cx="3383280" cy="585216"/>
+          </a:xfrm>
+          <a:prstGeom prst="rect">
+            <a:avLst/>
+          </a:prstGeom>
+          <a:noFill/>
+          <a:ln/>
+        </p:spPr>
+        <p:txBody>
+          <a:bodyPr wrap="square" lIns="0" tIns="0" rIns="0" bIns="0" rtlCol="0" anchor="ctr"/>
+          <a:lstStyle/>
+          <a:p>
+            <a:pPr indent="0" marL="0">
+              <a:buNone/>
+            </a:pPr>
+            <a:r>
+              <a:rPr lang="en-US" sz="950" i="1" dirty="0">
+                <a:solidFill>
+                  <a:srgbClr val="FFFFFF"/>
+                </a:solidFill>
+              </a:rPr>
+              <a:t>Claude Code / Copilot: Copilot Chat routes to codebase search vs. documentation lookup vs. code generation depending on intent.</a:t>
+            </a:r>
+            <a:endParaRPr lang="en-US" sz="950" dirty="0"/>
+          </a:p>
+        </p:txBody>
+      </p:sp>
+      <p:sp>
+        <p:nvSpPr>
+          <p:cNvPr id="32" name="Text 30"/>
+          <p:cNvSpPr/>
+          <p:nvPr/>
+        </p:nvSpPr>
+        <p:spPr>
+          <a:xfrm>
+            <a:off x="320040" y="4956048"/>
+            <a:ext cx="8503920" cy="219456"/>
+          </a:xfrm>
+          <a:prstGeom prst="rect">
+            <a:avLst/>
+          </a:prstGeom>
+          <a:noFill/>
+          <a:ln/>
+        </p:spPr>
+        <p:txBody>
+          <a:bodyPr wrap="square" lIns="0" tIns="0" rIns="0" bIns="0" rtlCol="0" anchor="ctr"/>
+          <a:lstStyle/>
           <a:p>
             <a:pPr algn="ctr" indent="0" marL="0">
               <a:buNone/>
             </a:pPr>
             <a:r>
-              <a:rPr lang="en-US" sz="1100" b="1" dirty="0">
-                <a:solidFill>
-                  <a:srgbClr val="FFFFFF"/>
-                </a:solidFill>
-              </a:rPr>
-              <a:t>Judge LLM</a:t>
-            </a:r>
-            <a:endParaRPr lang="en-US" sz="1100" dirty="0"/>
-          </a:p>
-        </p:txBody>
-      </p:sp>
-      <p:sp>
-        <p:nvSpPr>
-          <p:cNvPr id="23" name="Text 21"/>
-          <p:cNvSpPr/>
-          <p:nvPr/>
-        </p:nvSpPr>
-        <p:spPr>
-          <a:xfrm>
-            <a:off x="5568696" y="1490472"/>
-            <a:ext cx="1389888" cy="960120"/>
-          </a:xfrm>
-          <a:prstGeom prst="rect">
-            <a:avLst/>
-          </a:prstGeom>
-          <a:noFill/>
-          <a:ln/>
-        </p:spPr>
-        <p:txBody>
-          <a:bodyPr wrap="square" lIns="0" tIns="0" rIns="0" bIns="0" rtlCol="0" anchor="ctr"/>
-          <a:lstStyle/>
-          <a:p>
-            <a:pPr algn="ctr" indent="0" marL="0">
-              <a:buNone/>
-            </a:pPr>
-            <a:r>
-              <a:rPr lang="en-US" sz="1000" dirty="0">
-                <a:solidFill>
-                  <a:srgbClr val="7A90A8"/>
-                </a:solidFill>
-              </a:rPr>
-              <a:t>Tests, lint, diff evaluation</a:t>
-            </a:r>
-            <a:endParaRPr lang="en-US" sz="1000" dirty="0"/>
-          </a:p>
-        </p:txBody>
-      </p:sp>
-      <p:sp>
-        <p:nvSpPr>
-          <p:cNvPr id="24" name="Text 22"/>
-          <p:cNvSpPr/>
-          <p:nvPr/>
-        </p:nvSpPr>
-        <p:spPr>
-          <a:xfrm>
-            <a:off x="7050024" y="1536192"/>
-            <a:ext cx="146304" cy="411480"/>
-          </a:xfrm>
-          <a:prstGeom prst="rect">
-            <a:avLst/>
-          </a:prstGeom>
-          <a:noFill/>
-          <a:ln/>
-        </p:spPr>
-        <p:txBody>
-          <a:bodyPr wrap="square" lIns="0" tIns="0" rIns="0" bIns="0" rtlCol="0" anchor="ctr"/>
-          <a:lstStyle/>
-          <a:p>
-            <a:pPr algn="ctr" indent="0" marL="0">
-              <a:buNone/>
-            </a:pPr>
-            <a:r>
-              <a:rPr lang="en-US" sz="1800" dirty="0">
-                <a:solidFill>
-                  <a:srgbClr val="7A90A8"/>
-                </a:solidFill>
-              </a:rPr>
-              <a:t>→</a:t>
-            </a:r>
-            <a:endParaRPr lang="en-US" sz="1800" dirty="0"/>
-          </a:p>
-        </p:txBody>
-      </p:sp>
-      <p:sp>
-        <p:nvSpPr>
-          <p:cNvPr id="25" name="Shape 23"/>
-          <p:cNvSpPr/>
-          <p:nvPr/>
-        </p:nvSpPr>
-        <p:spPr>
-          <a:xfrm>
-            <a:off x="7196328" y="896112"/>
-            <a:ext cx="1572768" cy="1691640"/>
-          </a:xfrm>
-          <a:prstGeom prst="rect">
-            <a:avLst/>
-          </a:prstGeom>
-          <a:solidFill>
-            <a:srgbClr val="FFFFFF"/>
-          </a:solidFill>
-          <a:ln/>
-          <a:effectLst>
-            <a:outerShdw sx="100000" sy="100000" kx="0" ky="0" algn="bl" rotWithShape="0" blurRad="101600" dist="38100" dir="8100000">
-              <a:srgbClr val="000000">
-                <a:alpha val="13000"/>
-              </a:srgbClr>
-            </a:outerShdw>
-          </a:effectLst>
-        </p:spPr>
-      </p:sp>
-      <p:sp>
-        <p:nvSpPr>
-          <p:cNvPr id="26" name="Shape 24"/>
-          <p:cNvSpPr/>
-          <p:nvPr/>
-        </p:nvSpPr>
-        <p:spPr>
-          <a:xfrm>
-            <a:off x="7196328" y="896112"/>
-            <a:ext cx="1572768" cy="530352"/>
-          </a:xfrm>
-          <a:prstGeom prst="rect">
-            <a:avLst/>
-          </a:prstGeom>
-          <a:solidFill>
-            <a:srgbClr val="8096B0"/>
-          </a:solidFill>
-          <a:ln/>
-        </p:spPr>
-      </p:sp>
-      <p:sp>
-        <p:nvSpPr>
-          <p:cNvPr id="27" name="Text 25"/>
-          <p:cNvSpPr/>
-          <p:nvPr/>
-        </p:nvSpPr>
-        <p:spPr>
-          <a:xfrm>
-            <a:off x="7196328" y="896112"/>
-            <a:ext cx="1572768" cy="530352"/>
-          </a:xfrm>
-          <a:prstGeom prst="rect">
-            <a:avLst/>
-          </a:prstGeom>
-          <a:noFill/>
-          <a:ln/>
-        </p:spPr>
-        <p:txBody>
-          <a:bodyPr wrap="square" lIns="0" tIns="0" rIns="0" bIns="0" rtlCol="0" anchor="ctr"/>
-          <a:lstStyle/>
-          <a:p>
-            <a:pPr algn="ctr" indent="0" marL="0">
-              <a:buNone/>
-            </a:pPr>
-            <a:r>
-              <a:rPr lang="en-US" sz="1100" b="1" dirty="0">
-                <a:solidFill>
-                  <a:srgbClr val="FFFFFF"/>
-                </a:solidFill>
-              </a:rPr>
-              <a:t>PR → Human</a:t>
-            </a:r>
-            <a:endParaRPr lang="en-US" sz="1100" dirty="0"/>
-          </a:p>
-          <a:p>
-            <a:pPr algn="ctr" indent="0" marL="0">
-              <a:buNone/>
-            </a:pPr>
-            <a:r>
-              <a:rPr lang="en-US" sz="1100" b="1" dirty="0">
-                <a:solidFill>
-                  <a:srgbClr val="FFFFFF"/>
-                </a:solidFill>
-              </a:rPr>
-              <a:t>Review</a:t>
-            </a:r>
-            <a:endParaRPr lang="en-US" sz="1100" dirty="0"/>
-          </a:p>
-        </p:txBody>
-      </p:sp>
-      <p:sp>
-        <p:nvSpPr>
-          <p:cNvPr id="28" name="Text 26"/>
-          <p:cNvSpPr/>
-          <p:nvPr/>
-        </p:nvSpPr>
-        <p:spPr>
-          <a:xfrm>
-            <a:off x="7287768" y="1490472"/>
-            <a:ext cx="1389888" cy="960120"/>
-          </a:xfrm>
-          <a:prstGeom prst="rect">
-            <a:avLst/>
-          </a:prstGeom>
-          <a:noFill/>
-          <a:ln/>
-        </p:spPr>
-        <p:txBody>
-          <a:bodyPr wrap="square" lIns="0" tIns="0" rIns="0" bIns="0" rtlCol="0" anchor="ctr"/>
-          <a:lstStyle/>
-          <a:p>
-            <a:pPr algn="ctr" indent="0" marL="0">
-              <a:buNone/>
-            </a:pPr>
-            <a:r>
-              <a:rPr lang="en-US" sz="1000" dirty="0">
-                <a:solidFill>
-                  <a:srgbClr val="7A90A8"/>
-                </a:solidFill>
-              </a:rPr>
-              <a:t>Diff summary in Slack</a:t>
-            </a:r>
-            <a:endParaRPr lang="en-US" sz="1000" dirty="0"/>
-          </a:p>
-        </p:txBody>
-      </p:sp>
-      <p:sp>
-        <p:nvSpPr>
-          <p:cNvPr id="29" name="Shape 27"/>
-          <p:cNvSpPr/>
-          <p:nvPr/>
-        </p:nvSpPr>
-        <p:spPr>
-          <a:xfrm>
-            <a:off x="320040" y="2743200"/>
-            <a:ext cx="4206240" cy="987552"/>
-          </a:xfrm>
-          <a:prstGeom prst="rect">
-            <a:avLst/>
-          </a:prstGeom>
-          <a:solidFill>
-            <a:srgbClr val="FFFFFF"/>
-          </a:solidFill>
-          <a:ln/>
-          <a:effectLst>
-            <a:outerShdw sx="100000" sy="100000" kx="0" ky="0" algn="bl" rotWithShape="0" blurRad="101600" dist="38100" dir="8100000">
-              <a:srgbClr val="000000">
-                <a:alpha val="13000"/>
-              </a:srgbClr>
-            </a:outerShdw>
-          </a:effectLst>
-        </p:spPr>
-      </p:sp>
-      <p:sp>
-        <p:nvSpPr>
-          <p:cNvPr id="30" name="Shape 28"/>
-          <p:cNvSpPr/>
-          <p:nvPr/>
-        </p:nvSpPr>
-        <p:spPr>
-          <a:xfrm>
-            <a:off x="320040" y="2743200"/>
-            <a:ext cx="54864" cy="987552"/>
-          </a:xfrm>
-          <a:prstGeom prst="rect">
-            <a:avLst/>
-          </a:prstGeom>
-          <a:solidFill>
-            <a:srgbClr val="3A7DC9"/>
-          </a:solidFill>
-          <a:ln/>
-        </p:spPr>
-      </p:sp>
-      <p:sp>
-        <p:nvSpPr>
-          <p:cNvPr id="31" name="Text 29"/>
-          <p:cNvSpPr/>
-          <p:nvPr/>
-        </p:nvSpPr>
-        <p:spPr>
-          <a:xfrm>
-            <a:off x="466344" y="2798064"/>
-            <a:ext cx="3931920" cy="329184"/>
-          </a:xfrm>
-          <a:prstGeom prst="rect">
-            <a:avLst/>
-          </a:prstGeom>
-          <a:noFill/>
-          <a:ln/>
-        </p:spPr>
-        <p:txBody>
-          <a:bodyPr wrap="square" lIns="0" tIns="0" rIns="0" bIns="0" rtlCol="0" anchor="ctr"/>
-          <a:lstStyle/>
-          <a:p>
-            <a:pPr indent="0" marL="0">
-              <a:buNone/>
-            </a:pPr>
-            <a:r>
-              <a:rPr lang="en-US" sz="1200" b="1" dirty="0">
-                <a:solidFill>
-                  <a:srgbClr val="1C3557"/>
-                </a:solidFill>
-              </a:rPr>
-              <a:t>✓ Sandboxed container</a:t>
-            </a:r>
-            <a:endParaRPr lang="en-US" sz="1200" dirty="0"/>
-          </a:p>
-        </p:txBody>
-      </p:sp>
-      <p:sp>
-        <p:nvSpPr>
-          <p:cNvPr id="32" name="Text 30"/>
-          <p:cNvSpPr/>
-          <p:nvPr/>
-        </p:nvSpPr>
-        <p:spPr>
-          <a:xfrm>
-            <a:off x="466344" y="3163824"/>
-            <a:ext cx="3931920" cy="475488"/>
-          </a:xfrm>
-          <a:prstGeom prst="rect">
-            <a:avLst/>
-          </a:prstGeom>
-          <a:noFill/>
-          <a:ln/>
-        </p:spPr>
-        <p:txBody>
-          <a:bodyPr wrap="square" lIns="0" tIns="0" rIns="0" bIns="0" rtlCol="0" anchor="ctr"/>
-          <a:lstStyle/>
-          <a:p>
-            <a:pPr indent="0" marL="0">
-              <a:buNone/>
-            </a:pPr>
-            <a:r>
-              <a:rPr lang="en-US" sz="1100" dirty="0">
-                <a:solidFill>
-                  <a:srgbClr val="7A90A8"/>
-                </a:solidFill>
-              </a:rPr>
-              <a:t>Agent runs with minimal permissions and binaries. Intentional flexibility reduction = predictability + security.</a:t>
-            </a:r>
-            <a:endParaRPr lang="en-US" sz="1100" dirty="0"/>
-          </a:p>
-        </p:txBody>
-      </p:sp>
-      <p:sp>
-        <p:nvSpPr>
-          <p:cNvPr id="33" name="Shape 31"/>
-          <p:cNvSpPr/>
-          <p:nvPr/>
-        </p:nvSpPr>
-        <p:spPr>
-          <a:xfrm>
-            <a:off x="4690872" y="2743200"/>
-            <a:ext cx="4206240" cy="987552"/>
-          </a:xfrm>
-          <a:prstGeom prst="rect">
-            <a:avLst/>
-          </a:prstGeom>
-          <a:solidFill>
-            <a:srgbClr val="FFFFFF"/>
-          </a:solidFill>
-          <a:ln/>
-          <a:effectLst>
-            <a:outerShdw sx="100000" sy="100000" kx="0" ky="0" algn="bl" rotWithShape="0" blurRad="101600" dist="38100" dir="8100000">
-              <a:srgbClr val="000000">
-                <a:alpha val="13000"/>
-              </a:srgbClr>
-            </a:outerShdw>
-          </a:effectLst>
-        </p:spPr>
-      </p:sp>
-      <p:sp>
-        <p:nvSpPr>
-          <p:cNvPr id="34" name="Shape 32"/>
-          <p:cNvSpPr/>
-          <p:nvPr/>
-        </p:nvSpPr>
-        <p:spPr>
-          <a:xfrm>
-            <a:off x="4690872" y="2743200"/>
-            <a:ext cx="54864" cy="987552"/>
-          </a:xfrm>
-          <a:prstGeom prst="rect">
-            <a:avLst/>
-          </a:prstGeom>
-          <a:solidFill>
-            <a:srgbClr val="3A7DC9"/>
-          </a:solidFill>
-          <a:ln/>
-        </p:spPr>
-      </p:sp>
-      <p:sp>
-        <p:nvSpPr>
-          <p:cNvPr id="35" name="Text 33"/>
-          <p:cNvSpPr/>
-          <p:nvPr/>
-        </p:nvSpPr>
-        <p:spPr>
-          <a:xfrm>
-            <a:off x="4837176" y="2798064"/>
-            <a:ext cx="3931920" cy="329184"/>
-          </a:xfrm>
-          <a:prstGeom prst="rect">
-            <a:avLst/>
-          </a:prstGeom>
-          <a:noFill/>
-          <a:ln/>
-        </p:spPr>
-        <p:txBody>
-          <a:bodyPr wrap="square" lIns="0" tIns="0" rIns="0" bIns="0" rtlCol="0" anchor="ctr"/>
-          <a:lstStyle/>
-          <a:p>
-            <a:pPr indent="0" marL="0">
-              <a:buNone/>
-            </a:pPr>
-            <a:r>
-              <a:rPr lang="en-US" sz="1200" b="1" dirty="0">
-                <a:solidFill>
-                  <a:srgbClr val="1C3557"/>
-                </a:solidFill>
-              </a:rPr>
-              <a:t>✓ Infrastructure outside</a:t>
-            </a:r>
-            <a:endParaRPr lang="en-US" sz="1200" dirty="0"/>
-          </a:p>
-        </p:txBody>
-      </p:sp>
-      <p:sp>
-        <p:nvSpPr>
-          <p:cNvPr id="36" name="Text 34"/>
-          <p:cNvSpPr/>
-          <p:nvPr/>
-        </p:nvSpPr>
-        <p:spPr>
-          <a:xfrm>
-            <a:off x="4837176" y="3163824"/>
-            <a:ext cx="3931920" cy="475488"/>
-          </a:xfrm>
-          <a:prstGeom prst="rect">
-            <a:avLst/>
-          </a:prstGeom>
-          <a:noFill/>
-          <a:ln/>
-        </p:spPr>
-        <p:txBody>
-          <a:bodyPr wrap="square" lIns="0" tIns="0" rIns="0" bIns="0" rtlCol="0" anchor="ctr"/>
-          <a:lstStyle/>
-          <a:p>
-            <a:pPr indent="0" marL="0">
-              <a:buNone/>
-            </a:pPr>
-            <a:r>
-              <a:rPr lang="en-US" sz="1100" dirty="0">
-                <a:solidFill>
-                  <a:srgbClr val="7A90A8"/>
-                </a:solidFill>
-              </a:rPr>
-              <a:t>Slack comms, git push, prompt authoring all handled outside the agent. Agent focuses only on code changes.</a:t>
-            </a:r>
-            <a:endParaRPr lang="en-US" sz="1100" dirty="0"/>
-          </a:p>
-        </p:txBody>
-      </p:sp>
-      <p:sp>
-        <p:nvSpPr>
-          <p:cNvPr id="37" name="Shape 35"/>
-          <p:cNvSpPr/>
-          <p:nvPr/>
-        </p:nvSpPr>
-        <p:spPr>
-          <a:xfrm>
-            <a:off x="320040" y="3840480"/>
-            <a:ext cx="4206240" cy="987552"/>
-          </a:xfrm>
-          <a:prstGeom prst="rect">
-            <a:avLst/>
-          </a:prstGeom>
-          <a:solidFill>
-            <a:srgbClr val="FFFFFF"/>
-          </a:solidFill>
-          <a:ln/>
-          <a:effectLst>
-            <a:outerShdw sx="100000" sy="100000" kx="0" ky="0" algn="bl" rotWithShape="0" blurRad="101600" dist="38100" dir="8100000">
-              <a:srgbClr val="000000">
-                <a:alpha val="13000"/>
-              </a:srgbClr>
-            </a:outerShdw>
-          </a:effectLst>
-        </p:spPr>
-      </p:sp>
-      <p:sp>
-        <p:nvSpPr>
-          <p:cNvPr id="38" name="Shape 36"/>
-          <p:cNvSpPr/>
-          <p:nvPr/>
-        </p:nvSpPr>
-        <p:spPr>
-          <a:xfrm>
-            <a:off x="320040" y="3840480"/>
-            <a:ext cx="54864" cy="987552"/>
-          </a:xfrm>
-          <a:prstGeom prst="rect">
-            <a:avLst/>
-          </a:prstGeom>
-          <a:solidFill>
-            <a:srgbClr val="3A7DC9"/>
-          </a:solidFill>
-          <a:ln/>
-        </p:spPr>
-      </p:sp>
-      <p:sp>
-        <p:nvSpPr>
-          <p:cNvPr id="39" name="Text 37"/>
-          <p:cNvSpPr/>
-          <p:nvPr/>
-        </p:nvSpPr>
-        <p:spPr>
-          <a:xfrm>
-            <a:off x="466344" y="3895344"/>
-            <a:ext cx="3931920" cy="329184"/>
-          </a:xfrm>
-          <a:prstGeom prst="rect">
-            <a:avLst/>
-          </a:prstGeom>
-          <a:noFill/>
-          <a:ln/>
-        </p:spPr>
-        <p:txBody>
-          <a:bodyPr wrap="square" lIns="0" tIns="0" rIns="0" bIns="0" rtlCol="0" anchor="ctr"/>
-          <a:lstStyle/>
-          <a:p>
-            <a:pPr indent="0" marL="0">
-              <a:buNone/>
-            </a:pPr>
-            <a:r>
-              <a:rPr lang="en-US" sz="1200" b="1" dirty="0">
-                <a:solidFill>
-                  <a:srgbClr val="1C3557"/>
-                </a:solidFill>
-              </a:rPr>
-              <a:t>✓ Verifier loop</a:t>
-            </a:r>
-            <a:endParaRPr lang="en-US" sz="1200" dirty="0"/>
-          </a:p>
-        </p:txBody>
-      </p:sp>
-      <p:sp>
-        <p:nvSpPr>
-          <p:cNvPr id="40" name="Text 38"/>
-          <p:cNvSpPr/>
-          <p:nvPr/>
-        </p:nvSpPr>
-        <p:spPr>
-          <a:xfrm>
-            <a:off x="466344" y="4261104"/>
-            <a:ext cx="3931920" cy="475488"/>
-          </a:xfrm>
-          <a:prstGeom prst="rect">
-            <a:avLst/>
-          </a:prstGeom>
-          <a:noFill/>
-          <a:ln/>
-        </p:spPr>
-        <p:txBody>
-          <a:bodyPr wrap="square" lIns="0" tIns="0" rIns="0" bIns="0" rtlCol="0" anchor="ctr"/>
-          <a:lstStyle/>
-          <a:p>
-            <a:pPr indent="0" marL="0">
-              <a:buNone/>
-            </a:pPr>
-            <a:r>
-              <a:rPr lang="en-US" sz="1100" dirty="0">
-                <a:solidFill>
-                  <a:srgbClr val="7A90A8"/>
-                </a:solidFill>
-              </a:rPr>
-              <a:t>Unit tests + linter run before PR opens. Without this, agents produced code that 'didn't work.' (Honk Part 3)</a:t>
-            </a:r>
-            <a:endParaRPr lang="en-US" sz="1100" dirty="0"/>
-          </a:p>
-        </p:txBody>
-      </p:sp>
-      <p:sp>
-        <p:nvSpPr>
-          <p:cNvPr id="41" name="Shape 39"/>
-          <p:cNvSpPr/>
-          <p:nvPr/>
-        </p:nvSpPr>
-        <p:spPr>
-          <a:xfrm>
-            <a:off x="4690872" y="3840480"/>
-            <a:ext cx="4206240" cy="987552"/>
-          </a:xfrm>
-          <a:prstGeom prst="rect">
-            <a:avLst/>
-          </a:prstGeom>
-          <a:solidFill>
-            <a:srgbClr val="FFFFFF"/>
-          </a:solidFill>
-          <a:ln/>
-          <a:effectLst>
-            <a:outerShdw sx="100000" sy="100000" kx="0" ky="0" algn="bl" rotWithShape="0" blurRad="101600" dist="38100" dir="8100000">
-              <a:srgbClr val="000000">
-                <a:alpha val="13000"/>
-              </a:srgbClr>
-            </a:outerShdw>
-          </a:effectLst>
-        </p:spPr>
-      </p:sp>
-      <p:sp>
-        <p:nvSpPr>
-          <p:cNvPr id="42" name="Shape 40"/>
-          <p:cNvSpPr/>
-          <p:nvPr/>
-        </p:nvSpPr>
-        <p:spPr>
-          <a:xfrm>
-            <a:off x="4690872" y="3840480"/>
-            <a:ext cx="54864" cy="987552"/>
-          </a:xfrm>
-          <a:prstGeom prst="rect">
-            <a:avLst/>
-          </a:prstGeom>
-          <a:solidFill>
-            <a:srgbClr val="3A7DC9"/>
-          </a:solidFill>
-          <a:ln/>
-        </p:spPr>
-      </p:sp>
-      <p:sp>
-        <p:nvSpPr>
-          <p:cNvPr id="43" name="Text 41"/>
-          <p:cNvSpPr/>
-          <p:nvPr/>
-        </p:nvSpPr>
-        <p:spPr>
-          <a:xfrm>
-            <a:off x="4837176" y="3895344"/>
-            <a:ext cx="3931920" cy="329184"/>
-          </a:xfrm>
-          <a:prstGeom prst="rect">
-            <a:avLst/>
-          </a:prstGeom>
-          <a:noFill/>
-          <a:ln/>
-        </p:spPr>
-        <p:txBody>
-          <a:bodyPr wrap="square" lIns="0" tIns="0" rIns="0" bIns="0" rtlCol="0" anchor="ctr"/>
-          <a:lstStyle/>
-          <a:p>
-            <a:pPr indent="0" marL="0">
-              <a:buNone/>
-            </a:pPr>
-            <a:r>
-              <a:rPr lang="en-US" sz="1200" b="1" dirty="0">
-                <a:solidFill>
-                  <a:srgbClr val="1C3557"/>
-                </a:solidFill>
-              </a:rPr>
-              <a:t>✓ Judge LLM</a:t>
-            </a:r>
-            <a:endParaRPr lang="en-US" sz="1200" dirty="0"/>
-          </a:p>
-        </p:txBody>
-      </p:sp>
-      <p:sp>
-        <p:nvSpPr>
-          <p:cNvPr id="44" name="Text 42"/>
-          <p:cNvSpPr/>
-          <p:nvPr/>
-        </p:nvSpPr>
-        <p:spPr>
-          <a:xfrm>
-            <a:off x="4837176" y="4261104"/>
-            <a:ext cx="3931920" cy="475488"/>
-          </a:xfrm>
-          <a:prstGeom prst="rect">
-            <a:avLst/>
-          </a:prstGeom>
-          <a:noFill/>
-          <a:ln/>
-        </p:spPr>
-        <p:txBody>
-          <a:bodyPr wrap="square" lIns="0" tIns="0" rIns="0" bIns="0" rtlCol="0" anchor="ctr"/>
-          <a:lstStyle/>
-          <a:p>
-            <a:pPr indent="0" marL="0">
-              <a:buNone/>
-            </a:pPr>
-            <a:r>
-              <a:rPr lang="en-US" sz="1100" dirty="0">
-                <a:solidFill>
-                  <a:srgbClr val="7A90A8"/>
-                </a:solidFill>
-              </a:rPr>
-              <a:t>A separate LLM evaluates the diff for correctness, scope, and quality before human review — another agent as reviewer.</a:t>
-            </a:r>
-            <a:endParaRPr lang="en-US" sz="1100" dirty="0"/>
-          </a:p>
-        </p:txBody>
-      </p:sp>
-      <p:sp>
-        <p:nvSpPr>
-          <p:cNvPr id="45" name="Text 43"/>
-          <p:cNvSpPr/>
-          <p:nvPr/>
-        </p:nvSpPr>
-        <p:spPr>
-          <a:xfrm>
-            <a:off x="320040" y="4892040"/>
-            <a:ext cx="8503920" cy="219456"/>
-          </a:xfrm>
-          <a:prstGeom prst="rect">
-            <a:avLst/>
-          </a:prstGeom>
-          <a:noFill/>
-          <a:ln/>
-        </p:spPr>
-        <p:txBody>
-          <a:bodyPr wrap="square" lIns="0" tIns="0" rIns="0" bIns="0" rtlCol="0" anchor="ctr"/>
-          <a:lstStyle/>
-          <a:p>
-            <a:pPr indent="0" marL="0">
-              <a:buNone/>
-            </a:pPr>
-            <a:r>
-              <a:rPr lang="en-US" sz="1050" b="1" i="1" dirty="0">
-                <a:solidFill>
-                  <a:srgbClr val="4A7FA8"/>
-                </a:solidFill>
-              </a:rPr>
-              <a:t>Result: ~50% of all Spotify PRs automated · 1,500+ agent PRs merged · 50+ features shipped in 2025</a:t>
-            </a:r>
-            <a:endParaRPr lang="en-US" sz="1050" dirty="0"/>
+              <a:rPr lang="en-US" sz="950" i="1" dirty="0">
+                <a:solidFill>
+                  <a:srgbClr val="5B8DB8"/>
+                </a:solidFill>
+              </a:rPr>
+              <a:t>Understanding these patterns helps you reason about Claude Code behaviour and design production systems when the time comes.</a:t>
+            </a:r>
+            <a:endParaRPr lang="en-US" sz="950" dirty="0"/>
           </a:p>
         </p:txBody>
       </p:sp>
@@ -3946,31 +3525,31 @@
         </p:nvSpPr>
         <p:spPr>
           <a:xfrm>
-            <a:off x="365760" y="868680"/>
-            <a:ext cx="8412480" cy="438912"/>
-          </a:xfrm>
-          <a:prstGeom prst="rect">
-            <a:avLst/>
-          </a:prstGeom>
-          <a:noFill/>
-          <a:ln/>
-        </p:spPr>
-        <p:txBody>
-          <a:bodyPr wrap="square" lIns="0" tIns="0" rIns="0" bIns="0" rtlCol="0" anchor="ctr"/>
-          <a:lstStyle/>
-          <a:p>
-            <a:pPr indent="0" marL="0">
-              <a:buNone/>
-            </a:pPr>
-            <a:r>
-              <a:rPr lang="en-US" sz="1900" b="1" dirty="0">
+            <a:off x="365760" y="822960"/>
+            <a:ext cx="8412480" cy="365760"/>
+          </a:xfrm>
+          <a:prstGeom prst="rect">
+            <a:avLst/>
+          </a:prstGeom>
+          <a:noFill/>
+          <a:ln/>
+        </p:spPr>
+        <p:txBody>
+          <a:bodyPr wrap="square" lIns="0" tIns="0" rIns="0" bIns="0" rtlCol="0" anchor="ctr"/>
+          <a:lstStyle/>
+          <a:p>
+            <a:pPr indent="0" marL="0">
+              <a:buNone/>
+            </a:pPr>
+            <a:r>
+              <a:rPr lang="en-US" sz="1700" b="1" dirty="0">
                 <a:solidFill>
                   <a:srgbClr val="1C3557"/>
                 </a:solidFill>
               </a:rPr>
-              <a:t>Design a Multi-Agent Architecture for a Real Problem</a:t>
-            </a:r>
-            <a:endParaRPr lang="en-US" sz="1900" dirty="0"/>
+              <a:t>Apply the Vocabulary to a Real Claude Code Scenario</a:t>
+            </a:r>
+            <a:endParaRPr lang="en-US" sz="1700" dirty="0"/>
           </a:p>
         </p:txBody>
       </p:sp>
@@ -3982,8 +3561,8 @@
         </p:nvSpPr>
         <p:spPr>
           <a:xfrm>
-            <a:off x="320040" y="1417320"/>
-            <a:ext cx="8503920" cy="795528"/>
+            <a:off x="320040" y="1261872"/>
+            <a:ext cx="8503920" cy="658368"/>
           </a:xfrm>
           <a:prstGeom prst="rect">
             <a:avLst/>
@@ -4009,14 +3588,14 @@
         </p:nvSpPr>
         <p:spPr>
           <a:xfrm>
-            <a:off x="320040" y="1417320"/>
-            <a:ext cx="502920" cy="795528"/>
-          </a:xfrm>
-          <a:prstGeom prst="rect">
-            <a:avLst/>
-          </a:prstGeom>
-          <a:solidFill>
-            <a:srgbClr val="4A7FA8"/>
+            <a:off x="320040" y="1261872"/>
+            <a:ext cx="54864" cy="658368"/>
+          </a:xfrm>
+          <a:prstGeom prst="rect">
+            <a:avLst/>
+          </a:prstGeom>
+          <a:solidFill>
+            <a:srgbClr val="3A7DC9"/>
           </a:solidFill>
           <a:ln/>
         </p:spPr>
@@ -4029,31 +3608,31 @@
         </p:nvSpPr>
         <p:spPr>
           <a:xfrm>
-            <a:off x="320040" y="1417320"/>
-            <a:ext cx="502920" cy="795528"/>
-          </a:xfrm>
-          <a:prstGeom prst="rect">
-            <a:avLst/>
-          </a:prstGeom>
-          <a:noFill/>
-          <a:ln/>
-        </p:spPr>
-        <p:txBody>
-          <a:bodyPr wrap="square" lIns="0" tIns="0" rIns="0" bIns="0" rtlCol="0" anchor="ctr"/>
-          <a:lstStyle/>
-          <a:p>
-            <a:pPr algn="ctr" indent="0" marL="0">
-              <a:buNone/>
-            </a:pPr>
-            <a:r>
-              <a:rPr lang="en-US" sz="2200" b="1" dirty="0">
-                <a:solidFill>
-                  <a:srgbClr val="FFFFFF"/>
-                </a:solidFill>
-              </a:rPr>
-              <a:t>1</a:t>
-            </a:r>
-            <a:endParaRPr lang="en-US" sz="2200" dirty="0"/>
+            <a:off x="457200" y="1261872"/>
+            <a:ext cx="1097280" cy="292608"/>
+          </a:xfrm>
+          <a:prstGeom prst="rect">
+            <a:avLst/>
+          </a:prstGeom>
+          <a:noFill/>
+          <a:ln/>
+        </p:spPr>
+        <p:txBody>
+          <a:bodyPr wrap="square" lIns="0" tIns="0" rIns="0" bIns="0" rtlCol="0" anchor="ctr"/>
+          <a:lstStyle/>
+          <a:p>
+            <a:pPr indent="0" marL="0">
+              <a:buNone/>
+            </a:pPr>
+            <a:r>
+              <a:rPr lang="en-US" sz="1000" b="1" spc="200" kern="0" dirty="0">
+                <a:solidFill>
+                  <a:srgbClr val="3A7DC9"/>
+                </a:solidFill>
+              </a:rPr>
+              <a:t>SCENARIO</a:t>
+            </a:r>
+            <a:endParaRPr lang="en-US" sz="1000" dirty="0"/>
           </a:p>
         </p:txBody>
       </p:sp>
@@ -4065,116 +3644,44 @@
         </p:nvSpPr>
         <p:spPr>
           <a:xfrm>
-            <a:off x="914400" y="1472184"/>
-            <a:ext cx="1280160" cy="292608"/>
-          </a:xfrm>
-          <a:prstGeom prst="rect">
-            <a:avLst/>
-          </a:prstGeom>
-          <a:noFill/>
-          <a:ln/>
-        </p:spPr>
-        <p:txBody>
-          <a:bodyPr wrap="square" lIns="0" tIns="0" rIns="0" bIns="0" rtlCol="0" anchor="ctr"/>
-          <a:lstStyle/>
-          <a:p>
-            <a:pPr indent="0" marL="0">
-              <a:buNone/>
-            </a:pPr>
-            <a:r>
-              <a:rPr lang="en-US" sz="1300" b="1" dirty="0">
-                <a:solidFill>
-                  <a:srgbClr val="4A7FA8"/>
-                </a:solidFill>
-              </a:rPr>
-              <a:t>Choose a Task</a:t>
-            </a:r>
-            <a:endParaRPr lang="en-US" sz="1300" dirty="0"/>
-          </a:p>
-        </p:txBody>
-      </p:sp>
-      <p:sp>
-        <p:nvSpPr>
-          <p:cNvPr id="9" name="Text 7"/>
-          <p:cNvSpPr/>
-          <p:nvPr/>
-        </p:nvSpPr>
-        <p:spPr>
-          <a:xfrm>
-            <a:off x="2194560" y="1472184"/>
-            <a:ext cx="822960" cy="292608"/>
-          </a:xfrm>
-          <a:prstGeom prst="rect">
-            <a:avLst/>
-          </a:prstGeom>
-          <a:noFill/>
-          <a:ln/>
-        </p:spPr>
-        <p:txBody>
-          <a:bodyPr wrap="square" lIns="0" tIns="0" rIns="0" bIns="0" rtlCol="0" anchor="ctr"/>
-          <a:lstStyle/>
-          <a:p>
-            <a:pPr indent="0" marL="0">
-              <a:buNone/>
-            </a:pPr>
-            <a:r>
-              <a:rPr lang="en-US" sz="1100" i="1" dirty="0">
-                <a:solidFill>
-                  <a:srgbClr val="7A90A8"/>
-                </a:solidFill>
-              </a:rPr>
-              <a:t>(5 min)</a:t>
-            </a:r>
-            <a:endParaRPr lang="en-US" sz="1100" dirty="0"/>
-          </a:p>
-        </p:txBody>
-      </p:sp>
-      <p:sp>
-        <p:nvSpPr>
-          <p:cNvPr id="10" name="Text 8"/>
-          <p:cNvSpPr/>
-          <p:nvPr/>
-        </p:nvSpPr>
-        <p:spPr>
-          <a:xfrm>
-            <a:off x="914400" y="1819656"/>
-            <a:ext cx="7818120" cy="347472"/>
-          </a:xfrm>
-          <a:prstGeom prst="rect">
-            <a:avLst/>
-          </a:prstGeom>
-          <a:noFill/>
-          <a:ln/>
-        </p:spPr>
-        <p:txBody>
-          <a:bodyPr wrap="square" lIns="0" tIns="0" rIns="0" bIns="0" rtlCol="0" anchor="ctr"/>
-          <a:lstStyle/>
-          <a:p>
-            <a:pPr indent="0" marL="0">
-              <a:buNone/>
-            </a:pPr>
-            <a:r>
-              <a:rPr lang="en-US" sz="1100" dirty="0">
-                <a:solidFill>
-                  <a:srgbClr val="7A90A8"/>
-                </a:solidFill>
-              </a:rPr>
-              <a:t>Pick a real engineering workflow from your team: dependency updates, PR reviews, doc generation, test coverage gap analysis, or another repetitive multi-step process.</a:t>
-            </a:r>
-            <a:endParaRPr lang="en-US" sz="1100" dirty="0"/>
-          </a:p>
-        </p:txBody>
-      </p:sp>
-      <p:sp>
-        <p:nvSpPr>
-          <p:cNvPr id="11" name="Shape 9"/>
-          <p:cNvSpPr/>
-          <p:nvPr/>
-        </p:nvSpPr>
-        <p:spPr>
-          <a:xfrm>
-            <a:off x="320040" y="2304288"/>
-            <a:ext cx="8503920" cy="795528"/>
+            <a:off x="457200" y="1517904"/>
+            <a:ext cx="8275320" cy="347472"/>
+          </a:xfrm>
+          <a:prstGeom prst="rect">
+            <a:avLst/>
+          </a:prstGeom>
+          <a:noFill/>
+          <a:ln/>
+        </p:spPr>
+        <p:txBody>
+          <a:bodyPr wrap="square" lIns="0" tIns="0" rIns="0" bIns="0" rtlCol="0" anchor="ctr"/>
+          <a:lstStyle/>
+          <a:p>
+            <a:pPr indent="0" marL="0">
+              <a:buNone/>
+            </a:pPr>
+            <a:r>
+              <a:rPr lang="en-US" sz="1150" i="1" dirty="0">
+                <a:solidFill>
+                  <a:srgbClr val="1E2D3D"/>
+                </a:solidFill>
+              </a:rPr>
+              <a:t>A developer asks Claude Code: "Refactor the PaymentService to extract a separate InvoiceService, move the relevant methods, update all call sites, and make sure the tests still pass."</a:t>
+            </a:r>
+            <a:endParaRPr lang="en-US" sz="1150" dirty="0"/>
+          </a:p>
+        </p:txBody>
+      </p:sp>
+      <p:sp>
+        <p:nvSpPr>
+          <p:cNvPr id="9" name="Shape 7"/>
+          <p:cNvSpPr/>
+          <p:nvPr/>
+        </p:nvSpPr>
+        <p:spPr>
+          <a:xfrm>
+            <a:off x="320040" y="2011680"/>
+            <a:ext cx="8503920" cy="530352"/>
           </a:xfrm>
           <a:prstGeom prst="rect">
             <a:avLst/>
@@ -4194,14 +3701,14 @@
       </p:sp>
       <p:sp>
         <p:nvSpPr>
-          <p:cNvPr id="12" name="Shape 10"/>
-          <p:cNvSpPr/>
-          <p:nvPr/>
-        </p:nvSpPr>
-        <p:spPr>
-          <a:xfrm>
-            <a:off x="320040" y="2304288"/>
-            <a:ext cx="502920" cy="795528"/>
+          <p:cNvPr id="10" name="Shape 8"/>
+          <p:cNvSpPr/>
+          <p:nvPr/>
+        </p:nvSpPr>
+        <p:spPr>
+          <a:xfrm>
+            <a:off x="320040" y="2011680"/>
+            <a:ext cx="411480" cy="530352"/>
           </a:xfrm>
           <a:prstGeom prst="rect">
             <a:avLst/>
@@ -4214,37 +3721,109 @@
       </p:sp>
       <p:sp>
         <p:nvSpPr>
+          <p:cNvPr id="11" name="Text 9"/>
+          <p:cNvSpPr/>
+          <p:nvPr/>
+        </p:nvSpPr>
+        <p:spPr>
+          <a:xfrm>
+            <a:off x="320040" y="2011680"/>
+            <a:ext cx="411480" cy="530352"/>
+          </a:xfrm>
+          <a:prstGeom prst="rect">
+            <a:avLst/>
+          </a:prstGeom>
+          <a:noFill/>
+          <a:ln/>
+        </p:spPr>
+        <p:txBody>
+          <a:bodyPr wrap="square" lIns="0" tIns="0" rIns="0" bIns="0" rtlCol="0" anchor="ctr"/>
+          <a:lstStyle/>
+          <a:p>
+            <a:pPr algn="ctr" indent="0" marL="0">
+              <a:buNone/>
+            </a:pPr>
+            <a:r>
+              <a:rPr lang="en-US" sz="1800" b="1" dirty="0">
+                <a:solidFill>
+                  <a:srgbClr val="FFFFFF"/>
+                </a:solidFill>
+              </a:rPr>
+              <a:t>1</a:t>
+            </a:r>
+            <a:endParaRPr lang="en-US" sz="1800" dirty="0"/>
+          </a:p>
+        </p:txBody>
+      </p:sp>
+      <p:sp>
+        <p:nvSpPr>
+          <p:cNvPr id="12" name="Text 10"/>
+          <p:cNvSpPr/>
+          <p:nvPr/>
+        </p:nvSpPr>
+        <p:spPr>
+          <a:xfrm>
+            <a:off x="822960" y="2048256"/>
+            <a:ext cx="1828800" cy="237744"/>
+          </a:xfrm>
+          <a:prstGeom prst="rect">
+            <a:avLst/>
+          </a:prstGeom>
+          <a:noFill/>
+          <a:ln/>
+        </p:spPr>
+        <p:txBody>
+          <a:bodyPr wrap="square" lIns="0" tIns="0" rIns="0" bIns="0" rtlCol="0" anchor="ctr"/>
+          <a:lstStyle/>
+          <a:p>
+            <a:pPr indent="0" marL="0">
+              <a:buNone/>
+            </a:pPr>
+            <a:r>
+              <a:rPr lang="en-US" sz="1200" b="1" dirty="0">
+                <a:solidFill>
+                  <a:srgbClr val="4A7FA8"/>
+                </a:solidFill>
+              </a:rPr>
+              <a:t>Map the Agent Loop</a:t>
+            </a:r>
+            <a:endParaRPr lang="en-US" sz="1200" dirty="0"/>
+          </a:p>
+        </p:txBody>
+      </p:sp>
+      <p:sp>
+        <p:nvSpPr>
           <p:cNvPr id="13" name="Text 11"/>
           <p:cNvSpPr/>
           <p:nvPr/>
         </p:nvSpPr>
         <p:spPr>
           <a:xfrm>
-            <a:off x="320040" y="2304288"/>
-            <a:ext cx="502920" cy="795528"/>
-          </a:xfrm>
-          <a:prstGeom prst="rect">
-            <a:avLst/>
-          </a:prstGeom>
-          <a:noFill/>
-          <a:ln/>
-        </p:spPr>
-        <p:txBody>
-          <a:bodyPr wrap="square" lIns="0" tIns="0" rIns="0" bIns="0" rtlCol="0" anchor="ctr"/>
-          <a:lstStyle/>
-          <a:p>
-            <a:pPr algn="ctr" indent="0" marL="0">
-              <a:buNone/>
-            </a:pPr>
-            <a:r>
-              <a:rPr lang="en-US" sz="2200" b="1" dirty="0">
-                <a:solidFill>
-                  <a:srgbClr val="FFFFFF"/>
-                </a:solidFill>
-              </a:rPr>
-              <a:t>2</a:t>
-            </a:r>
-            <a:endParaRPr lang="en-US" sz="2200" dirty="0"/>
+            <a:off x="2651760" y="2048256"/>
+            <a:ext cx="731520" cy="237744"/>
+          </a:xfrm>
+          <a:prstGeom prst="rect">
+            <a:avLst/>
+          </a:prstGeom>
+          <a:noFill/>
+          <a:ln/>
+        </p:spPr>
+        <p:txBody>
+          <a:bodyPr wrap="square" lIns="0" tIns="0" rIns="0" bIns="0" rtlCol="0" anchor="ctr"/>
+          <a:lstStyle/>
+          <a:p>
+            <a:pPr indent="0" marL="0">
+              <a:buNone/>
+            </a:pPr>
+            <a:r>
+              <a:rPr lang="en-US" sz="1050" i="1" dirty="0">
+                <a:solidFill>
+                  <a:srgbClr val="7A90A8"/>
+                </a:solidFill>
+              </a:rPr>
+              <a:t>(5 min)</a:t>
+            </a:r>
+            <a:endParaRPr lang="en-US" sz="1050" dirty="0"/>
           </a:p>
         </p:txBody>
       </p:sp>
@@ -4256,116 +3835,44 @@
         </p:nvSpPr>
         <p:spPr>
           <a:xfrm>
-            <a:off x="914400" y="2359152"/>
-            <a:ext cx="1280160" cy="292608"/>
-          </a:xfrm>
-          <a:prstGeom prst="rect">
-            <a:avLst/>
-          </a:prstGeom>
-          <a:noFill/>
-          <a:ln/>
-        </p:spPr>
-        <p:txBody>
-          <a:bodyPr wrap="square" lIns="0" tIns="0" rIns="0" bIns="0" rtlCol="0" anchor="ctr"/>
-          <a:lstStyle/>
-          <a:p>
-            <a:pPr indent="0" marL="0">
-              <a:buNone/>
-            </a:pPr>
-            <a:r>
-              <a:rPr lang="en-US" sz="1300" b="1" dirty="0">
-                <a:solidFill>
-                  <a:srgbClr val="4A7FA8"/>
-                </a:solidFill>
-              </a:rPr>
-              <a:t>Map the Architecture</a:t>
-            </a:r>
-            <a:endParaRPr lang="en-US" sz="1300" dirty="0"/>
-          </a:p>
-        </p:txBody>
-      </p:sp>
-      <p:sp>
-        <p:nvSpPr>
-          <p:cNvPr id="15" name="Text 13"/>
-          <p:cNvSpPr/>
-          <p:nvPr/>
-        </p:nvSpPr>
-        <p:spPr>
-          <a:xfrm>
-            <a:off x="2194560" y="2359152"/>
-            <a:ext cx="822960" cy="292608"/>
-          </a:xfrm>
-          <a:prstGeom prst="rect">
-            <a:avLst/>
-          </a:prstGeom>
-          <a:noFill/>
-          <a:ln/>
-        </p:spPr>
-        <p:txBody>
-          <a:bodyPr wrap="square" lIns="0" tIns="0" rIns="0" bIns="0" rtlCol="0" anchor="ctr"/>
-          <a:lstStyle/>
-          <a:p>
-            <a:pPr indent="0" marL="0">
-              <a:buNone/>
-            </a:pPr>
-            <a:r>
-              <a:rPr lang="en-US" sz="1100" i="1" dirty="0">
+            <a:off x="822960" y="2286000"/>
+            <a:ext cx="7909560" cy="228600"/>
+          </a:xfrm>
+          <a:prstGeom prst="rect">
+            <a:avLst/>
+          </a:prstGeom>
+          <a:noFill/>
+          <a:ln/>
+        </p:spPr>
+        <p:txBody>
+          <a:bodyPr wrap="square" lIns="0" tIns="0" rIns="0" bIns="0" rtlCol="0" anchor="ctr"/>
+          <a:lstStyle/>
+          <a:p>
+            <a:pPr indent="0" marL="0">
+              <a:buNone/>
+            </a:pPr>
+            <a:r>
+              <a:rPr lang="en-US" sz="1050" dirty="0">
                 <a:solidFill>
                   <a:srgbClr val="7A90A8"/>
                 </a:solidFill>
               </a:rPr>
-              <a:t>(8 min)</a:t>
-            </a:r>
-            <a:endParaRPr lang="en-US" sz="1100" dirty="0"/>
-          </a:p>
-        </p:txBody>
-      </p:sp>
-      <p:sp>
-        <p:nvSpPr>
-          <p:cNvPr id="16" name="Text 14"/>
-          <p:cNvSpPr/>
-          <p:nvPr/>
-        </p:nvSpPr>
-        <p:spPr>
-          <a:xfrm>
-            <a:off x="914400" y="2706624"/>
-            <a:ext cx="7818120" cy="347472"/>
-          </a:xfrm>
-          <a:prstGeom prst="rect">
-            <a:avLst/>
-          </a:prstGeom>
-          <a:noFill/>
-          <a:ln/>
-        </p:spPr>
-        <p:txBody>
-          <a:bodyPr wrap="square" lIns="0" tIns="0" rIns="0" bIns="0" rtlCol="0" anchor="ctr"/>
-          <a:lstStyle/>
-          <a:p>
-            <a:pPr indent="0" marL="0">
-              <a:buNone/>
-            </a:pPr>
-            <a:r>
-              <a:rPr lang="en-US" sz="1100" dirty="0">
-                <a:solidFill>
-                  <a:srgbClr val="7A90A8"/>
-                </a:solidFill>
-              </a:rPr>
-              <a:t>Draw the agent graph: Who is the orchestrator? What are the subagents? What tools does each need? Where are the HITL gates? What goes into each agent's context?</a:t>
-            </a:r>
-            <a:endParaRPr lang="en-US" sz="1100" dirty="0"/>
-          </a:p>
-        </p:txBody>
-      </p:sp>
-      <p:sp>
-        <p:nvSpPr>
-          <p:cNvPr id="17" name="Shape 15"/>
-          <p:cNvSpPr/>
-          <p:nvPr/>
-        </p:nvSpPr>
-        <p:spPr>
-          <a:xfrm>
-            <a:off x="320040" y="3191256"/>
-            <a:ext cx="8503920" cy="795528"/>
+              <a:t>Break this task into the steps Claude Code would take. For each step: what tool does it call? What does it observe? What decision does it make next?</a:t>
+            </a:r>
+            <a:endParaRPr lang="en-US" sz="1050" dirty="0"/>
+          </a:p>
+        </p:txBody>
+      </p:sp>
+      <p:sp>
+        <p:nvSpPr>
+          <p:cNvPr id="15" name="Shape 13"/>
+          <p:cNvSpPr/>
+          <p:nvPr/>
+        </p:nvSpPr>
+        <p:spPr>
+          <a:xfrm>
+            <a:off x="320040" y="2596896"/>
+            <a:ext cx="8503920" cy="530352"/>
           </a:xfrm>
           <a:prstGeom prst="rect">
             <a:avLst/>
@@ -4385,14 +3892,14 @@
       </p:sp>
       <p:sp>
         <p:nvSpPr>
-          <p:cNvPr id="18" name="Shape 16"/>
-          <p:cNvSpPr/>
-          <p:nvPr/>
-        </p:nvSpPr>
-        <p:spPr>
-          <a:xfrm>
-            <a:off x="320040" y="3191256"/>
-            <a:ext cx="502920" cy="795528"/>
+          <p:cNvPr id="16" name="Shape 14"/>
+          <p:cNvSpPr/>
+          <p:nvPr/>
+        </p:nvSpPr>
+        <p:spPr>
+          <a:xfrm>
+            <a:off x="320040" y="2596896"/>
+            <a:ext cx="411480" cy="530352"/>
           </a:xfrm>
           <a:prstGeom prst="rect">
             <a:avLst/>
@@ -4405,37 +3912,109 @@
       </p:sp>
       <p:sp>
         <p:nvSpPr>
+          <p:cNvPr id="17" name="Text 15"/>
+          <p:cNvSpPr/>
+          <p:nvPr/>
+        </p:nvSpPr>
+        <p:spPr>
+          <a:xfrm>
+            <a:off x="320040" y="2596896"/>
+            <a:ext cx="411480" cy="530352"/>
+          </a:xfrm>
+          <a:prstGeom prst="rect">
+            <a:avLst/>
+          </a:prstGeom>
+          <a:noFill/>
+          <a:ln/>
+        </p:spPr>
+        <p:txBody>
+          <a:bodyPr wrap="square" lIns="0" tIns="0" rIns="0" bIns="0" rtlCol="0" anchor="ctr"/>
+          <a:lstStyle/>
+          <a:p>
+            <a:pPr algn="ctr" indent="0" marL="0">
+              <a:buNone/>
+            </a:pPr>
+            <a:r>
+              <a:rPr lang="en-US" sz="1800" b="1" dirty="0">
+                <a:solidFill>
+                  <a:srgbClr val="FFFFFF"/>
+                </a:solidFill>
+              </a:rPr>
+              <a:t>2</a:t>
+            </a:r>
+            <a:endParaRPr lang="en-US" sz="1800" dirty="0"/>
+          </a:p>
+        </p:txBody>
+      </p:sp>
+      <p:sp>
+        <p:nvSpPr>
+          <p:cNvPr id="18" name="Text 16"/>
+          <p:cNvSpPr/>
+          <p:nvPr/>
+        </p:nvSpPr>
+        <p:spPr>
+          <a:xfrm>
+            <a:off x="822960" y="2633472"/>
+            <a:ext cx="1828800" cy="237744"/>
+          </a:xfrm>
+          <a:prstGeom prst="rect">
+            <a:avLst/>
+          </a:prstGeom>
+          <a:noFill/>
+          <a:ln/>
+        </p:spPr>
+        <p:txBody>
+          <a:bodyPr wrap="square" lIns="0" tIns="0" rIns="0" bIns="0" rtlCol="0" anchor="ctr"/>
+          <a:lstStyle/>
+          <a:p>
+            <a:pPr indent="0" marL="0">
+              <a:buNone/>
+            </a:pPr>
+            <a:r>
+              <a:rPr lang="en-US" sz="1200" b="1" dirty="0">
+                <a:solidFill>
+                  <a:srgbClr val="4A7FA8"/>
+                </a:solidFill>
+              </a:rPr>
+              <a:t>Classify the Tools</a:t>
+            </a:r>
+            <a:endParaRPr lang="en-US" sz="1200" dirty="0"/>
+          </a:p>
+        </p:txBody>
+      </p:sp>
+      <p:sp>
+        <p:nvSpPr>
           <p:cNvPr id="19" name="Text 17"/>
           <p:cNvSpPr/>
           <p:nvPr/>
         </p:nvSpPr>
         <p:spPr>
           <a:xfrm>
-            <a:off x="320040" y="3191256"/>
-            <a:ext cx="502920" cy="795528"/>
-          </a:xfrm>
-          <a:prstGeom prst="rect">
-            <a:avLst/>
-          </a:prstGeom>
-          <a:noFill/>
-          <a:ln/>
-        </p:spPr>
-        <p:txBody>
-          <a:bodyPr wrap="square" lIns="0" tIns="0" rIns="0" bIns="0" rtlCol="0" anchor="ctr"/>
-          <a:lstStyle/>
-          <a:p>
-            <a:pPr algn="ctr" indent="0" marL="0">
-              <a:buNone/>
-            </a:pPr>
-            <a:r>
-              <a:rPr lang="en-US" sz="2200" b="1" dirty="0">
-                <a:solidFill>
-                  <a:srgbClr val="FFFFFF"/>
-                </a:solidFill>
-              </a:rPr>
-              <a:t>3</a:t>
-            </a:r>
-            <a:endParaRPr lang="en-US" sz="2200" dirty="0"/>
+            <a:off x="2651760" y="2633472"/>
+            <a:ext cx="731520" cy="237744"/>
+          </a:xfrm>
+          <a:prstGeom prst="rect">
+            <a:avLst/>
+          </a:prstGeom>
+          <a:noFill/>
+          <a:ln/>
+        </p:spPr>
+        <p:txBody>
+          <a:bodyPr wrap="square" lIns="0" tIns="0" rIns="0" bIns="0" rtlCol="0" anchor="ctr"/>
+          <a:lstStyle/>
+          <a:p>
+            <a:pPr indent="0" marL="0">
+              <a:buNone/>
+            </a:pPr>
+            <a:r>
+              <a:rPr lang="en-US" sz="1050" i="1" dirty="0">
+                <a:solidFill>
+                  <a:srgbClr val="7A90A8"/>
+                </a:solidFill>
+              </a:rPr>
+              <a:t>(5 min)</a:t>
+            </a:r>
+            <a:endParaRPr lang="en-US" sz="1050" dirty="0"/>
           </a:p>
         </p:txBody>
       </p:sp>
@@ -4447,116 +4026,44 @@
         </p:nvSpPr>
         <p:spPr>
           <a:xfrm>
-            <a:off x="914400" y="3246120"/>
-            <a:ext cx="1280160" cy="292608"/>
-          </a:xfrm>
-          <a:prstGeom prst="rect">
-            <a:avLst/>
-          </a:prstGeom>
-          <a:noFill/>
-          <a:ln/>
-        </p:spPr>
-        <p:txBody>
-          <a:bodyPr wrap="square" lIns="0" tIns="0" rIns="0" bIns="0" rtlCol="0" anchor="ctr"/>
-          <a:lstStyle/>
-          <a:p>
-            <a:pPr indent="0" marL="0">
-              <a:buNone/>
-            </a:pPr>
-            <a:r>
-              <a:rPr lang="en-US" sz="1300" b="1" dirty="0">
-                <a:solidFill>
-                  <a:srgbClr val="4A7FA8"/>
-                </a:solidFill>
-              </a:rPr>
-              <a:t>Apply 12-Factor Check</a:t>
-            </a:r>
-            <a:endParaRPr lang="en-US" sz="1300" dirty="0"/>
-          </a:p>
-        </p:txBody>
-      </p:sp>
-      <p:sp>
-        <p:nvSpPr>
-          <p:cNvPr id="21" name="Text 19"/>
-          <p:cNvSpPr/>
-          <p:nvPr/>
-        </p:nvSpPr>
-        <p:spPr>
-          <a:xfrm>
-            <a:off x="2194560" y="3246120"/>
-            <a:ext cx="822960" cy="292608"/>
-          </a:xfrm>
-          <a:prstGeom prst="rect">
-            <a:avLst/>
-          </a:prstGeom>
-          <a:noFill/>
-          <a:ln/>
-        </p:spPr>
-        <p:txBody>
-          <a:bodyPr wrap="square" lIns="0" tIns="0" rIns="0" bIns="0" rtlCol="0" anchor="ctr"/>
-          <a:lstStyle/>
-          <a:p>
-            <a:pPr indent="0" marL="0">
-              <a:buNone/>
-            </a:pPr>
-            <a:r>
-              <a:rPr lang="en-US" sz="1100" i="1" dirty="0">
+            <a:off x="822960" y="2871216"/>
+            <a:ext cx="7909560" cy="228600"/>
+          </a:xfrm>
+          <a:prstGeom prst="rect">
+            <a:avLst/>
+          </a:prstGeom>
+          <a:noFill/>
+          <a:ln/>
+        </p:spPr>
+        <p:txBody>
+          <a:bodyPr wrap="square" lIns="0" tIns="0" rIns="0" bIns="0" rtlCol="0" anchor="ctr"/>
+          <a:lstStyle/>
+          <a:p>
+            <a:pPr indent="0" marL="0">
+              <a:buNone/>
+            </a:pPr>
+            <a:r>
+              <a:rPr lang="en-US" sz="1050" dirty="0">
                 <a:solidFill>
                   <a:srgbClr val="7A90A8"/>
                 </a:solidFill>
               </a:rPr>
-              <a:t>(7 min)</a:t>
-            </a:r>
-            <a:endParaRPr lang="en-US" sz="1100" dirty="0"/>
-          </a:p>
-        </p:txBody>
-      </p:sp>
-      <p:sp>
-        <p:nvSpPr>
-          <p:cNvPr id="22" name="Text 20"/>
-          <p:cNvSpPr/>
-          <p:nvPr/>
-        </p:nvSpPr>
-        <p:spPr>
-          <a:xfrm>
-            <a:off x="914400" y="3593592"/>
-            <a:ext cx="7818120" cy="347472"/>
-          </a:xfrm>
-          <a:prstGeom prst="rect">
-            <a:avLst/>
-          </a:prstGeom>
-          <a:noFill/>
-          <a:ln/>
-        </p:spPr>
-        <p:txBody>
-          <a:bodyPr wrap="square" lIns="0" tIns="0" rIns="0" bIns="0" rtlCol="0" anchor="ctr"/>
-          <a:lstStyle/>
-          <a:p>
-            <a:pPr indent="0" marL="0">
-              <a:buNone/>
-            </a:pPr>
-            <a:r>
-              <a:rPr lang="en-US" sz="1100" dirty="0">
-                <a:solidFill>
-                  <a:srgbClr val="7A90A8"/>
-                </a:solidFill>
-              </a:rPr>
-              <a:t>Run your design through factors 1–6 (Foundation &amp; Reliability). Does your agent own its context window? Is control flow in code? Are errors handled as signal?</a:t>
-            </a:r>
-            <a:endParaRPr lang="en-US" sz="1100" dirty="0"/>
-          </a:p>
-        </p:txBody>
-      </p:sp>
-      <p:sp>
-        <p:nvSpPr>
-          <p:cNvPr id="23" name="Shape 21"/>
-          <p:cNvSpPr/>
-          <p:nvPr/>
-        </p:nvSpPr>
-        <p:spPr>
-          <a:xfrm>
-            <a:off x="320040" y="4078224"/>
-            <a:ext cx="8503920" cy="795528"/>
+              <a:t>List every tool Claude Code would need (file read, file write, shell execution, etc.) and classify each as read, write, or communication.</a:t>
+            </a:r>
+            <a:endParaRPr lang="en-US" sz="1050" dirty="0"/>
+          </a:p>
+        </p:txBody>
+      </p:sp>
+      <p:sp>
+        <p:nvSpPr>
+          <p:cNvPr id="21" name="Shape 19"/>
+          <p:cNvSpPr/>
+          <p:nvPr/>
+        </p:nvSpPr>
+        <p:spPr>
+          <a:xfrm>
+            <a:off x="320040" y="3182112"/>
+            <a:ext cx="8503920" cy="530352"/>
           </a:xfrm>
           <a:prstGeom prst="rect">
             <a:avLst/>
@@ -4576,14 +4083,14 @@
       </p:sp>
       <p:sp>
         <p:nvSpPr>
-          <p:cNvPr id="24" name="Shape 22"/>
-          <p:cNvSpPr/>
-          <p:nvPr/>
-        </p:nvSpPr>
-        <p:spPr>
-          <a:xfrm>
-            <a:off x="320040" y="4078224"/>
-            <a:ext cx="502920" cy="795528"/>
+          <p:cNvPr id="22" name="Shape 20"/>
+          <p:cNvSpPr/>
+          <p:nvPr/>
+        </p:nvSpPr>
+        <p:spPr>
+          <a:xfrm>
+            <a:off x="320040" y="3182112"/>
+            <a:ext cx="411480" cy="530352"/>
           </a:xfrm>
           <a:prstGeom prst="rect">
             <a:avLst/>
@@ -4596,14 +4103,205 @@
       </p:sp>
       <p:sp>
         <p:nvSpPr>
+          <p:cNvPr id="23" name="Text 21"/>
+          <p:cNvSpPr/>
+          <p:nvPr/>
+        </p:nvSpPr>
+        <p:spPr>
+          <a:xfrm>
+            <a:off x="320040" y="3182112"/>
+            <a:ext cx="411480" cy="530352"/>
+          </a:xfrm>
+          <a:prstGeom prst="rect">
+            <a:avLst/>
+          </a:prstGeom>
+          <a:noFill/>
+          <a:ln/>
+        </p:spPr>
+        <p:txBody>
+          <a:bodyPr wrap="square" lIns="0" tIns="0" rIns="0" bIns="0" rtlCol="0" anchor="ctr"/>
+          <a:lstStyle/>
+          <a:p>
+            <a:pPr algn="ctr" indent="0" marL="0">
+              <a:buNone/>
+            </a:pPr>
+            <a:r>
+              <a:rPr lang="en-US" sz="1800" b="1" dirty="0">
+                <a:solidFill>
+                  <a:srgbClr val="FFFFFF"/>
+                </a:solidFill>
+              </a:rPr>
+              <a:t>3</a:t>
+            </a:r>
+            <a:endParaRPr lang="en-US" sz="1800" dirty="0"/>
+          </a:p>
+        </p:txBody>
+      </p:sp>
+      <p:sp>
+        <p:nvSpPr>
+          <p:cNvPr id="24" name="Text 22"/>
+          <p:cNvSpPr/>
+          <p:nvPr/>
+        </p:nvSpPr>
+        <p:spPr>
+          <a:xfrm>
+            <a:off x="822960" y="3218688"/>
+            <a:ext cx="1828800" cy="237744"/>
+          </a:xfrm>
+          <a:prstGeom prst="rect">
+            <a:avLst/>
+          </a:prstGeom>
+          <a:noFill/>
+          <a:ln/>
+        </p:spPr>
+        <p:txBody>
+          <a:bodyPr wrap="square" lIns="0" tIns="0" rIns="0" bIns="0" rtlCol="0" anchor="ctr"/>
+          <a:lstStyle/>
+          <a:p>
+            <a:pPr indent="0" marL="0">
+              <a:buNone/>
+            </a:pPr>
+            <a:r>
+              <a:rPr lang="en-US" sz="1200" b="1" dirty="0">
+                <a:solidFill>
+                  <a:srgbClr val="4A7FA8"/>
+                </a:solidFill>
+              </a:rPr>
+              <a:t>Identify Memory Use</a:t>
+            </a:r>
+            <a:endParaRPr lang="en-US" sz="1200" dirty="0"/>
+          </a:p>
+        </p:txBody>
+      </p:sp>
+      <p:sp>
+        <p:nvSpPr>
           <p:cNvPr id="25" name="Text 23"/>
           <p:cNvSpPr/>
           <p:nvPr/>
         </p:nvSpPr>
         <p:spPr>
           <a:xfrm>
-            <a:off x="320040" y="4078224"/>
-            <a:ext cx="502920" cy="795528"/>
+            <a:off x="2651760" y="3218688"/>
+            <a:ext cx="731520" cy="237744"/>
+          </a:xfrm>
+          <a:prstGeom prst="rect">
+            <a:avLst/>
+          </a:prstGeom>
+          <a:noFill/>
+          <a:ln/>
+        </p:spPr>
+        <p:txBody>
+          <a:bodyPr wrap="square" lIns="0" tIns="0" rIns="0" bIns="0" rtlCol="0" anchor="ctr"/>
+          <a:lstStyle/>
+          <a:p>
+            <a:pPr indent="0" marL="0">
+              <a:buNone/>
+            </a:pPr>
+            <a:r>
+              <a:rPr lang="en-US" sz="1050" i="1" dirty="0">
+                <a:solidFill>
+                  <a:srgbClr val="7A90A8"/>
+                </a:solidFill>
+              </a:rPr>
+              <a:t>(5 min)</a:t>
+            </a:r>
+            <a:endParaRPr lang="en-US" sz="1050" dirty="0"/>
+          </a:p>
+        </p:txBody>
+      </p:sp>
+      <p:sp>
+        <p:nvSpPr>
+          <p:cNvPr id="26" name="Text 24"/>
+          <p:cNvSpPr/>
+          <p:nvPr/>
+        </p:nvSpPr>
+        <p:spPr>
+          <a:xfrm>
+            <a:off x="822960" y="3456432"/>
+            <a:ext cx="7909560" cy="228600"/>
+          </a:xfrm>
+          <a:prstGeom prst="rect">
+            <a:avLst/>
+          </a:prstGeom>
+          <a:noFill/>
+          <a:ln/>
+        </p:spPr>
+        <p:txBody>
+          <a:bodyPr wrap="square" lIns="0" tIns="0" rIns="0" bIns="0" rtlCol="0" anchor="ctr"/>
+          <a:lstStyle/>
+          <a:p>
+            <a:pPr indent="0" marL="0">
+              <a:buNone/>
+            </a:pPr>
+            <a:r>
+              <a:rPr lang="en-US" sz="1050" dirty="0">
+                <a:solidFill>
+                  <a:srgbClr val="7A90A8"/>
+                </a:solidFill>
+              </a:rPr>
+              <a:t>What information must the agent carry forward across steps? Which memory type (in-context, external, semantic, episodic) applies to each piece of state?</a:t>
+            </a:r>
+            <a:endParaRPr lang="en-US" sz="1050" dirty="0"/>
+          </a:p>
+        </p:txBody>
+      </p:sp>
+      <p:sp>
+        <p:nvSpPr>
+          <p:cNvPr id="27" name="Shape 25"/>
+          <p:cNvSpPr/>
+          <p:nvPr/>
+        </p:nvSpPr>
+        <p:spPr>
+          <a:xfrm>
+            <a:off x="320040" y="3767328"/>
+            <a:ext cx="8503920" cy="530352"/>
+          </a:xfrm>
+          <a:prstGeom prst="rect">
+            <a:avLst/>
+          </a:prstGeom>
+          <a:solidFill>
+            <a:srgbClr val="F3F6F9"/>
+          </a:solidFill>
+          <a:ln/>
+          <a:effectLst>
+            <a:outerShdw sx="100000" sy="100000" kx="0" ky="0" algn="bl" rotWithShape="0" blurRad="101600" dist="38100" dir="8100000">
+              <a:srgbClr val="000000">
+                <a:alpha val="13000"/>
+              </a:srgbClr>
+            </a:outerShdw>
+          </a:effectLst>
+        </p:spPr>
+      </p:sp>
+      <p:sp>
+        <p:nvSpPr>
+          <p:cNvPr id="28" name="Shape 26"/>
+          <p:cNvSpPr/>
+          <p:nvPr/>
+        </p:nvSpPr>
+        <p:spPr>
+          <a:xfrm>
+            <a:off x="320040" y="3767328"/>
+            <a:ext cx="411480" cy="530352"/>
+          </a:xfrm>
+          <a:prstGeom prst="rect">
+            <a:avLst/>
+          </a:prstGeom>
+          <a:solidFill>
+            <a:srgbClr val="4A7FA8"/>
+          </a:solidFill>
+          <a:ln/>
+        </p:spPr>
+      </p:sp>
+      <p:sp>
+        <p:nvSpPr>
+          <p:cNvPr id="29" name="Text 27"/>
+          <p:cNvSpPr/>
+          <p:nvPr/>
+        </p:nvSpPr>
+        <p:spPr>
+          <a:xfrm>
+            <a:off x="320040" y="3767328"/>
+            <a:ext cx="411480" cy="530352"/>
           </a:xfrm>
           <a:prstGeom prst="rect">
             <a:avLst/>
@@ -4619,122 +4317,313 @@
               <a:buNone/>
             </a:pPr>
             <a:r>
-              <a:rPr lang="en-US" sz="2200" b="1" dirty="0">
+              <a:rPr lang="en-US" sz="1800" b="1" dirty="0">
                 <a:solidFill>
                   <a:srgbClr val="FFFFFF"/>
                 </a:solidFill>
               </a:rPr>
               <a:t>4</a:t>
             </a:r>
-            <a:endParaRPr lang="en-US" sz="2200" dirty="0"/>
-          </a:p>
-        </p:txBody>
-      </p:sp>
-      <p:sp>
-        <p:nvSpPr>
-          <p:cNvPr id="26" name="Text 24"/>
-          <p:cNvSpPr/>
-          <p:nvPr/>
-        </p:nvSpPr>
-        <p:spPr>
-          <a:xfrm>
-            <a:off x="914400" y="4133088"/>
-            <a:ext cx="1280160" cy="292608"/>
-          </a:xfrm>
-          <a:prstGeom prst="rect">
-            <a:avLst/>
-          </a:prstGeom>
-          <a:noFill/>
-          <a:ln/>
-        </p:spPr>
-        <p:txBody>
-          <a:bodyPr wrap="square" lIns="0" tIns="0" rIns="0" bIns="0" rtlCol="0" anchor="ctr"/>
-          <a:lstStyle/>
-          <a:p>
-            <a:pPr indent="0" marL="0">
-              <a:buNone/>
-            </a:pPr>
-            <a:r>
-              <a:rPr lang="en-US" sz="1300" b="1" dirty="0">
+            <a:endParaRPr lang="en-US" sz="1800" dirty="0"/>
+          </a:p>
+        </p:txBody>
+      </p:sp>
+      <p:sp>
+        <p:nvSpPr>
+          <p:cNvPr id="30" name="Text 28"/>
+          <p:cNvSpPr/>
+          <p:nvPr/>
+        </p:nvSpPr>
+        <p:spPr>
+          <a:xfrm>
+            <a:off x="822960" y="3803904"/>
+            <a:ext cx="1828800" cy="237744"/>
+          </a:xfrm>
+          <a:prstGeom prst="rect">
+            <a:avLst/>
+          </a:prstGeom>
+          <a:noFill/>
+          <a:ln/>
+        </p:spPr>
+        <p:txBody>
+          <a:bodyPr wrap="square" lIns="0" tIns="0" rIns="0" bIns="0" rtlCol="0" anchor="ctr"/>
+          <a:lstStyle/>
+          <a:p>
+            <a:pPr indent="0" marL="0">
+              <a:buNone/>
+            </a:pPr>
+            <a:r>
+              <a:rPr lang="en-US" sz="1200" b="1" dirty="0">
                 <a:solidFill>
                   <a:srgbClr val="4A7FA8"/>
                 </a:solidFill>
               </a:rPr>
-              <a:t>Present &amp; Critique</a:t>
-            </a:r>
-            <a:endParaRPr lang="en-US" sz="1300" dirty="0"/>
-          </a:p>
-        </p:txBody>
-      </p:sp>
-      <p:sp>
-        <p:nvSpPr>
-          <p:cNvPr id="27" name="Text 25"/>
-          <p:cNvSpPr/>
-          <p:nvPr/>
-        </p:nvSpPr>
-        <p:spPr>
-          <a:xfrm>
-            <a:off x="2194560" y="4133088"/>
-            <a:ext cx="822960" cy="292608"/>
-          </a:xfrm>
-          <a:prstGeom prst="rect">
-            <a:avLst/>
-          </a:prstGeom>
-          <a:noFill/>
-          <a:ln/>
-        </p:spPr>
-        <p:txBody>
-          <a:bodyPr wrap="square" lIns="0" tIns="0" rIns="0" bIns="0" rtlCol="0" anchor="ctr"/>
-          <a:lstStyle/>
-          <a:p>
-            <a:pPr indent="0" marL="0">
-              <a:buNone/>
-            </a:pPr>
-            <a:r>
-              <a:rPr lang="en-US" sz="1100" i="1" dirty="0">
+              <a:t>Define the Trust Boundary</a:t>
+            </a:r>
+            <a:endParaRPr lang="en-US" sz="1200" dirty="0"/>
+          </a:p>
+        </p:txBody>
+      </p:sp>
+      <p:sp>
+        <p:nvSpPr>
+          <p:cNvPr id="31" name="Text 29"/>
+          <p:cNvSpPr/>
+          <p:nvPr/>
+        </p:nvSpPr>
+        <p:spPr>
+          <a:xfrm>
+            <a:off x="2651760" y="3803904"/>
+            <a:ext cx="731520" cy="237744"/>
+          </a:xfrm>
+          <a:prstGeom prst="rect">
+            <a:avLst/>
+          </a:prstGeom>
+          <a:noFill/>
+          <a:ln/>
+        </p:spPr>
+        <p:txBody>
+          <a:bodyPr wrap="square" lIns="0" tIns="0" rIns="0" bIns="0" rtlCol="0" anchor="ctr"/>
+          <a:lstStyle/>
+          <a:p>
+            <a:pPr indent="0" marL="0">
+              <a:buNone/>
+            </a:pPr>
+            <a:r>
+              <a:rPr lang="en-US" sz="1050" i="1" dirty="0">
                 <a:solidFill>
                   <a:srgbClr val="7A90A8"/>
                 </a:solidFill>
               </a:rPr>
               <a:t>(5 min)</a:t>
             </a:r>
-            <a:endParaRPr lang="en-US" sz="1100" dirty="0"/>
-          </a:p>
-        </p:txBody>
-      </p:sp>
-      <p:sp>
-        <p:nvSpPr>
-          <p:cNvPr id="28" name="Text 26"/>
-          <p:cNvSpPr/>
-          <p:nvPr/>
-        </p:nvSpPr>
-        <p:spPr>
-          <a:xfrm>
-            <a:off x="914400" y="4480560"/>
-            <a:ext cx="7818120" cy="347472"/>
-          </a:xfrm>
-          <a:prstGeom prst="rect">
-            <a:avLst/>
-          </a:prstGeom>
-          <a:noFill/>
-          <a:ln/>
-        </p:spPr>
-        <p:txBody>
-          <a:bodyPr wrap="square" lIns="0" tIns="0" rIns="0" bIns="0" rtlCol="0" anchor="ctr"/>
-          <a:lstStyle/>
-          <a:p>
-            <a:pPr indent="0" marL="0">
-              <a:buNone/>
-            </a:pPr>
-            <a:r>
-              <a:rPr lang="en-US" sz="1100" dirty="0">
+            <a:endParaRPr lang="en-US" sz="1050" dirty="0"/>
+          </a:p>
+        </p:txBody>
+      </p:sp>
+      <p:sp>
+        <p:nvSpPr>
+          <p:cNvPr id="32" name="Text 30"/>
+          <p:cNvSpPr/>
+          <p:nvPr/>
+        </p:nvSpPr>
+        <p:spPr>
+          <a:xfrm>
+            <a:off x="822960" y="4041648"/>
+            <a:ext cx="7909560" cy="228600"/>
+          </a:xfrm>
+          <a:prstGeom prst="rect">
+            <a:avLst/>
+          </a:prstGeom>
+          <a:noFill/>
+          <a:ln/>
+        </p:spPr>
+        <p:txBody>
+          <a:bodyPr wrap="square" lIns="0" tIns="0" rIns="0" bIns="0" rtlCol="0" anchor="ctr"/>
+          <a:lstStyle/>
+          <a:p>
+            <a:pPr indent="0" marL="0">
+              <a:buNone/>
+            </a:pPr>
+            <a:r>
+              <a:rPr lang="en-US" sz="1050" dirty="0">
                 <a:solidFill>
                   <a:srgbClr val="7A90A8"/>
                 </a:solidFill>
               </a:rPr>
-              <a:t>One group presents. The group critiques: What's the biggest reliability risk? Where would you put the kill switch? What's the first thing you'd instrument in observability?</a:t>
-            </a:r>
-            <a:endParaRPr lang="en-US" sz="1100" dirty="0"/>
+              <a:t>What should Claude Code do autonomously? Where should it pause for human confirmation? Write the interrupt conditions for this specific task.</a:t>
+            </a:r>
+            <a:endParaRPr lang="en-US" sz="1050" dirty="0"/>
+          </a:p>
+        </p:txBody>
+      </p:sp>
+      <p:sp>
+        <p:nvSpPr>
+          <p:cNvPr id="33" name="Shape 31"/>
+          <p:cNvSpPr/>
+          <p:nvPr/>
+        </p:nvSpPr>
+        <p:spPr>
+          <a:xfrm>
+            <a:off x="320040" y="4352544"/>
+            <a:ext cx="8503920" cy="530352"/>
+          </a:xfrm>
+          <a:prstGeom prst="rect">
+            <a:avLst/>
+          </a:prstGeom>
+          <a:solidFill>
+            <a:srgbClr val="F3F6F9"/>
+          </a:solidFill>
+          <a:ln/>
+          <a:effectLst>
+            <a:outerShdw sx="100000" sy="100000" kx="0" ky="0" algn="bl" rotWithShape="0" blurRad="101600" dist="38100" dir="8100000">
+              <a:srgbClr val="000000">
+                <a:alpha val="13000"/>
+              </a:srgbClr>
+            </a:outerShdw>
+          </a:effectLst>
+        </p:spPr>
+      </p:sp>
+      <p:sp>
+        <p:nvSpPr>
+          <p:cNvPr id="34" name="Shape 32"/>
+          <p:cNvSpPr/>
+          <p:nvPr/>
+        </p:nvSpPr>
+        <p:spPr>
+          <a:xfrm>
+            <a:off x="320040" y="4352544"/>
+            <a:ext cx="411480" cy="530352"/>
+          </a:xfrm>
+          <a:prstGeom prst="rect">
+            <a:avLst/>
+          </a:prstGeom>
+          <a:solidFill>
+            <a:srgbClr val="4A7FA8"/>
+          </a:solidFill>
+          <a:ln/>
+        </p:spPr>
+      </p:sp>
+      <p:sp>
+        <p:nvSpPr>
+          <p:cNvPr id="35" name="Text 33"/>
+          <p:cNvSpPr/>
+          <p:nvPr/>
+        </p:nvSpPr>
+        <p:spPr>
+          <a:xfrm>
+            <a:off x="320040" y="4352544"/>
+            <a:ext cx="411480" cy="530352"/>
+          </a:xfrm>
+          <a:prstGeom prst="rect">
+            <a:avLst/>
+          </a:prstGeom>
+          <a:noFill/>
+          <a:ln/>
+        </p:spPr>
+        <p:txBody>
+          <a:bodyPr wrap="square" lIns="0" tIns="0" rIns="0" bIns="0" rtlCol="0" anchor="ctr"/>
+          <a:lstStyle/>
+          <a:p>
+            <a:pPr algn="ctr" indent="0" marL="0">
+              <a:buNone/>
+            </a:pPr>
+            <a:r>
+              <a:rPr lang="en-US" sz="1800" b="1" dirty="0">
+                <a:solidFill>
+                  <a:srgbClr val="FFFFFF"/>
+                </a:solidFill>
+              </a:rPr>
+              <a:t>5</a:t>
+            </a:r>
+            <a:endParaRPr lang="en-US" sz="1800" dirty="0"/>
+          </a:p>
+        </p:txBody>
+      </p:sp>
+      <p:sp>
+        <p:nvSpPr>
+          <p:cNvPr id="36" name="Text 34"/>
+          <p:cNvSpPr/>
+          <p:nvPr/>
+        </p:nvSpPr>
+        <p:spPr>
+          <a:xfrm>
+            <a:off x="822960" y="4389120"/>
+            <a:ext cx="1828800" cy="237744"/>
+          </a:xfrm>
+          <a:prstGeom prst="rect">
+            <a:avLst/>
+          </a:prstGeom>
+          <a:noFill/>
+          <a:ln/>
+        </p:spPr>
+        <p:txBody>
+          <a:bodyPr wrap="square" lIns="0" tIns="0" rIns="0" bIns="0" rtlCol="0" anchor="ctr"/>
+          <a:lstStyle/>
+          <a:p>
+            <a:pPr indent="0" marL="0">
+              <a:buNone/>
+            </a:pPr>
+            <a:r>
+              <a:rPr lang="en-US" sz="1200" b="1" dirty="0">
+                <a:solidFill>
+                  <a:srgbClr val="4A7FA8"/>
+                </a:solidFill>
+              </a:rPr>
+              <a:t>Apply a Pattern</a:t>
+            </a:r>
+            <a:endParaRPr lang="en-US" sz="1200" dirty="0"/>
+          </a:p>
+        </p:txBody>
+      </p:sp>
+      <p:sp>
+        <p:nvSpPr>
+          <p:cNvPr id="37" name="Text 35"/>
+          <p:cNvSpPr/>
+          <p:nvPr/>
+        </p:nvSpPr>
+        <p:spPr>
+          <a:xfrm>
+            <a:off x="2651760" y="4389120"/>
+            <a:ext cx="731520" cy="237744"/>
+          </a:xfrm>
+          <a:prstGeom prst="rect">
+            <a:avLst/>
+          </a:prstGeom>
+          <a:noFill/>
+          <a:ln/>
+        </p:spPr>
+        <p:txBody>
+          <a:bodyPr wrap="square" lIns="0" tIns="0" rIns="0" bIns="0" rtlCol="0" anchor="ctr"/>
+          <a:lstStyle/>
+          <a:p>
+            <a:pPr indent="0" marL="0">
+              <a:buNone/>
+            </a:pPr>
+            <a:r>
+              <a:rPr lang="en-US" sz="1050" i="1" dirty="0">
+                <a:solidFill>
+                  <a:srgbClr val="7A90A8"/>
+                </a:solidFill>
+              </a:rPr>
+              <a:t>(5 min)</a:t>
+            </a:r>
+            <a:endParaRPr lang="en-US" sz="1050" dirty="0"/>
+          </a:p>
+        </p:txBody>
+      </p:sp>
+      <p:sp>
+        <p:nvSpPr>
+          <p:cNvPr id="38" name="Text 36"/>
+          <p:cNvSpPr/>
+          <p:nvPr/>
+        </p:nvSpPr>
+        <p:spPr>
+          <a:xfrm>
+            <a:off x="822960" y="4626864"/>
+            <a:ext cx="7909560" cy="228600"/>
+          </a:xfrm>
+          <a:prstGeom prst="rect">
+            <a:avLst/>
+          </a:prstGeom>
+          <a:noFill/>
+          <a:ln/>
+        </p:spPr>
+        <p:txBody>
+          <a:bodyPr wrap="square" lIns="0" tIns="0" rIns="0" bIns="0" rtlCol="0" anchor="ctr"/>
+          <a:lstStyle/>
+          <a:p>
+            <a:pPr indent="0" marL="0">
+              <a:buNone/>
+            </a:pPr>
+            <a:r>
+              <a:rPr lang="en-US" sz="1050" dirty="0">
+                <a:solidFill>
+                  <a:srgbClr val="7A90A8"/>
+                </a:solidFill>
+              </a:rPr>
+              <a:t>Which multi-agent pattern best describes how Claude Code should approach this refactor — sequential pipeline, fan-out, or evaluator-optimizer? Why?</a:t>
+            </a:r>
+            <a:endParaRPr lang="en-US" sz="1050" dirty="0"/>
           </a:p>
         </p:txBody>
       </p:sp>
@@ -10862,8 +10751,66 @@
         </p:nvSpPr>
         <p:spPr>
           <a:xfrm>
-            <a:off x="3200400" y="1234440"/>
-            <a:ext cx="2743200" cy="777240"/>
+            <a:off x="320040" y="1170432"/>
+            <a:ext cx="8503920" cy="329184"/>
+          </a:xfrm>
+          <a:prstGeom prst="rect">
+            <a:avLst/>
+          </a:prstGeom>
+          <a:solidFill>
+            <a:srgbClr val="D4E4F0">
+              <a:alpha val="80000"/>
+            </a:srgbClr>
+          </a:solidFill>
+          <a:ln/>
+        </p:spPr>
+      </p:sp>
+      <p:sp>
+        <p:nvSpPr>
+          <p:cNvPr id="6" name="Text 4"/>
+          <p:cNvSpPr/>
+          <p:nvPr/>
+        </p:nvSpPr>
+        <p:spPr>
+          <a:xfrm>
+            <a:off x="384048" y="1170432"/>
+            <a:ext cx="8321040" cy="329184"/>
+          </a:xfrm>
+          <a:prstGeom prst="rect">
+            <a:avLst/>
+          </a:prstGeom>
+          <a:noFill/>
+          <a:ln/>
+        </p:spPr>
+        <p:txBody>
+          <a:bodyPr wrap="square" lIns="0" tIns="0" rIns="0" bIns="0" rtlCol="0" anchor="ctr"/>
+          <a:lstStyle/>
+          <a:p>
+            <a:pPr indent="0" marL="0">
+              <a:buNone/>
+            </a:pPr>
+            <a:r>
+              <a:rPr lang="en-US" sz="1000" dirty="0">
+                <a:solidFill>
+                  <a:srgbClr val="1C3557"/>
+                </a:solidFill>
+              </a:rPr>
+              <a:t>These patterns apply in two contexts: (1) inside your coding agent — explaining why Claude Code behaves as it does; and (2) in production agent systems your team may eventually build.</a:t>
+            </a:r>
+            <a:endParaRPr lang="en-US" sz="1000" dirty="0"/>
+          </a:p>
+        </p:txBody>
+      </p:sp>
+      <p:sp>
+        <p:nvSpPr>
+          <p:cNvPr id="7" name="Shape 5"/>
+          <p:cNvSpPr/>
+          <p:nvPr/>
+        </p:nvSpPr>
+        <p:spPr>
+          <a:xfrm>
+            <a:off x="3200400" y="1572768"/>
+            <a:ext cx="2743200" cy="749808"/>
           </a:xfrm>
           <a:prstGeom prst="rect">
             <a:avLst/>
@@ -10883,14 +10830,14 @@
       </p:sp>
       <p:sp>
         <p:nvSpPr>
-          <p:cNvPr id="6" name="Text 4"/>
-          <p:cNvSpPr/>
-          <p:nvPr/>
-        </p:nvSpPr>
-        <p:spPr>
-          <a:xfrm>
-            <a:off x="3200400" y="1234440"/>
-            <a:ext cx="2743200" cy="411480"/>
+          <p:cNvPr id="8" name="Text 6"/>
+          <p:cNvSpPr/>
+          <p:nvPr/>
+        </p:nvSpPr>
+        <p:spPr>
+          <a:xfrm>
+            <a:off x="3200400" y="1572768"/>
+            <a:ext cx="2743200" cy="384048"/>
           </a:xfrm>
           <a:prstGeom prst="rect">
             <a:avLst/>
@@ -10919,14 +10866,14 @@
       </p:sp>
       <p:sp>
         <p:nvSpPr>
-          <p:cNvPr id="7" name="Text 5"/>
-          <p:cNvSpPr/>
-          <p:nvPr/>
-        </p:nvSpPr>
-        <p:spPr>
-          <a:xfrm>
-            <a:off x="3200400" y="1645920"/>
-            <a:ext cx="2743200" cy="365760"/>
+          <p:cNvPr id="9" name="Text 7"/>
+          <p:cNvSpPr/>
+          <p:nvPr/>
+        </p:nvSpPr>
+        <p:spPr>
+          <a:xfrm>
+            <a:off x="3200400" y="1956816"/>
+            <a:ext cx="2743200" cy="347472"/>
           </a:xfrm>
           <a:prstGeom prst="rect">
             <a:avLst/>
@@ -10955,14 +10902,14 @@
       </p:sp>
       <p:sp>
         <p:nvSpPr>
-          <p:cNvPr id="8" name="Shape 6"/>
-          <p:cNvSpPr/>
-          <p:nvPr/>
-        </p:nvSpPr>
-        <p:spPr>
-          <a:xfrm>
-            <a:off x="4572000" y="2011680"/>
-            <a:ext cx="0" cy="1234440"/>
+          <p:cNvPr id="10" name="Shape 8"/>
+          <p:cNvSpPr/>
+          <p:nvPr/>
+        </p:nvSpPr>
+        <p:spPr>
+          <a:xfrm>
+            <a:off x="4572000" y="2322576"/>
+            <a:ext cx="0" cy="1078992"/>
           </a:xfrm>
           <a:prstGeom prst="line">
             <a:avLst/>
@@ -10978,14 +10925,14 @@
       </p:sp>
       <p:sp>
         <p:nvSpPr>
-          <p:cNvPr id="9" name="Shape 7"/>
-          <p:cNvSpPr/>
-          <p:nvPr/>
-        </p:nvSpPr>
-        <p:spPr>
-          <a:xfrm>
-            <a:off x="1234440" y="3246120"/>
-            <a:ext cx="0" cy="-914400"/>
+          <p:cNvPr id="11" name="Shape 9"/>
+          <p:cNvSpPr/>
+          <p:nvPr/>
+        </p:nvSpPr>
+        <p:spPr>
+          <a:xfrm>
+            <a:off x="1234440" y="3401568"/>
+            <a:ext cx="0" cy="-777240"/>
           </a:xfrm>
           <a:prstGeom prst="line">
             <a:avLst/>
@@ -11001,14 +10948,14 @@
       </p:sp>
       <p:sp>
         <p:nvSpPr>
-          <p:cNvPr id="10" name="Shape 8"/>
-          <p:cNvSpPr/>
-          <p:nvPr/>
-        </p:nvSpPr>
-        <p:spPr>
-          <a:xfrm>
-            <a:off x="320040" y="3246120"/>
-            <a:ext cx="1920240" cy="1280160"/>
+          <p:cNvPr id="12" name="Shape 10"/>
+          <p:cNvSpPr/>
+          <p:nvPr/>
+        </p:nvSpPr>
+        <p:spPr>
+          <a:xfrm>
+            <a:off x="320040" y="3401568"/>
+            <a:ext cx="1920240" cy="1170432"/>
           </a:xfrm>
           <a:prstGeom prst="rect">
             <a:avLst/>
@@ -11028,14 +10975,14 @@
       </p:sp>
       <p:sp>
         <p:nvSpPr>
-          <p:cNvPr id="11" name="Shape 9"/>
-          <p:cNvSpPr/>
-          <p:nvPr/>
-        </p:nvSpPr>
-        <p:spPr>
-          <a:xfrm>
-            <a:off x="320040" y="3246120"/>
-            <a:ext cx="1920240" cy="384048"/>
+          <p:cNvPr id="13" name="Shape 11"/>
+          <p:cNvSpPr/>
+          <p:nvPr/>
+        </p:nvSpPr>
+        <p:spPr>
+          <a:xfrm>
+            <a:off x="320040" y="3401568"/>
+            <a:ext cx="1920240" cy="365760"/>
           </a:xfrm>
           <a:prstGeom prst="rect">
             <a:avLst/>
@@ -11048,14 +10995,14 @@
       </p:sp>
       <p:sp>
         <p:nvSpPr>
-          <p:cNvPr id="12" name="Text 10"/>
-          <p:cNvSpPr/>
-          <p:nvPr/>
-        </p:nvSpPr>
-        <p:spPr>
-          <a:xfrm>
-            <a:off x="320040" y="3246120"/>
-            <a:ext cx="1920240" cy="384048"/>
+          <p:cNvPr id="14" name="Text 12"/>
+          <p:cNvSpPr/>
+          <p:nvPr/>
+        </p:nvSpPr>
+        <p:spPr>
+          <a:xfrm>
+            <a:off x="320040" y="3401568"/>
+            <a:ext cx="1920240" cy="365760"/>
           </a:xfrm>
           <a:prstGeom prst="rect">
             <a:avLst/>
@@ -11084,14 +11031,14 @@
       </p:sp>
       <p:sp>
         <p:nvSpPr>
-          <p:cNvPr id="13" name="Text 11"/>
-          <p:cNvSpPr/>
-          <p:nvPr/>
-        </p:nvSpPr>
-        <p:spPr>
-          <a:xfrm>
-            <a:off x="320040" y="3685032"/>
-            <a:ext cx="1920240" cy="274320"/>
+          <p:cNvPr id="15" name="Text 13"/>
+          <p:cNvSpPr/>
+          <p:nvPr/>
+        </p:nvSpPr>
+        <p:spPr>
+          <a:xfrm>
+            <a:off x="320040" y="3813048"/>
+            <a:ext cx="1920240" cy="256032"/>
           </a:xfrm>
           <a:prstGeom prst="rect">
             <a:avLst/>
@@ -11120,14 +11067,14 @@
       </p:sp>
       <p:sp>
         <p:nvSpPr>
-          <p:cNvPr id="14" name="Text 12"/>
-          <p:cNvSpPr/>
-          <p:nvPr/>
-        </p:nvSpPr>
-        <p:spPr>
-          <a:xfrm>
-            <a:off x="411480" y="4023360"/>
-            <a:ext cx="1737360" cy="384048"/>
+          <p:cNvPr id="16" name="Text 14"/>
+          <p:cNvSpPr/>
+          <p:nvPr/>
+        </p:nvSpPr>
+        <p:spPr>
+          <a:xfrm>
+            <a:off x="411480" y="4133088"/>
+            <a:ext cx="1737360" cy="347472"/>
           </a:xfrm>
           <a:prstGeom prst="rect">
             <a:avLst/>
@@ -11156,14 +11103,14 @@
       </p:sp>
       <p:sp>
         <p:nvSpPr>
-          <p:cNvPr id="15" name="Shape 13"/>
-          <p:cNvSpPr/>
-          <p:nvPr/>
-        </p:nvSpPr>
-        <p:spPr>
-          <a:xfrm>
-            <a:off x="4572000" y="2011680"/>
-            <a:ext cx="0" cy="1234440"/>
+          <p:cNvPr id="17" name="Shape 15"/>
+          <p:cNvSpPr/>
+          <p:nvPr/>
+        </p:nvSpPr>
+        <p:spPr>
+          <a:xfrm>
+            <a:off x="4572000" y="2322576"/>
+            <a:ext cx="0" cy="1078992"/>
           </a:xfrm>
           <a:prstGeom prst="line">
             <a:avLst/>
@@ -11179,14 +11126,14 @@
       </p:sp>
       <p:sp>
         <p:nvSpPr>
-          <p:cNvPr id="16" name="Shape 14"/>
-          <p:cNvSpPr/>
-          <p:nvPr/>
-        </p:nvSpPr>
-        <p:spPr>
-          <a:xfrm>
-            <a:off x="3410712" y="3246120"/>
-            <a:ext cx="0" cy="-914400"/>
+          <p:cNvPr id="18" name="Shape 16"/>
+          <p:cNvSpPr/>
+          <p:nvPr/>
+        </p:nvSpPr>
+        <p:spPr>
+          <a:xfrm>
+            <a:off x="3410712" y="3401568"/>
+            <a:ext cx="0" cy="-777240"/>
           </a:xfrm>
           <a:prstGeom prst="line">
             <a:avLst/>
@@ -11202,14 +11149,14 @@
       </p:sp>
       <p:sp>
         <p:nvSpPr>
-          <p:cNvPr id="17" name="Shape 15"/>
-          <p:cNvSpPr/>
-          <p:nvPr/>
-        </p:nvSpPr>
-        <p:spPr>
-          <a:xfrm>
-            <a:off x="2496312" y="3246120"/>
-            <a:ext cx="1920240" cy="1280160"/>
+          <p:cNvPr id="19" name="Shape 17"/>
+          <p:cNvSpPr/>
+          <p:nvPr/>
+        </p:nvSpPr>
+        <p:spPr>
+          <a:xfrm>
+            <a:off x="2496312" y="3401568"/>
+            <a:ext cx="1920240" cy="1170432"/>
           </a:xfrm>
           <a:prstGeom prst="rect">
             <a:avLst/>
@@ -11229,14 +11176,14 @@
       </p:sp>
       <p:sp>
         <p:nvSpPr>
-          <p:cNvPr id="18" name="Shape 16"/>
-          <p:cNvSpPr/>
-          <p:nvPr/>
-        </p:nvSpPr>
-        <p:spPr>
-          <a:xfrm>
-            <a:off x="2496312" y="3246120"/>
-            <a:ext cx="1920240" cy="384048"/>
+          <p:cNvPr id="20" name="Shape 18"/>
+          <p:cNvSpPr/>
+          <p:nvPr/>
+        </p:nvSpPr>
+        <p:spPr>
+          <a:xfrm>
+            <a:off x="2496312" y="3401568"/>
+            <a:ext cx="1920240" cy="365760"/>
           </a:xfrm>
           <a:prstGeom prst="rect">
             <a:avLst/>
@@ -11249,14 +11196,14 @@
       </p:sp>
       <p:sp>
         <p:nvSpPr>
-          <p:cNvPr id="19" name="Text 17"/>
-          <p:cNvSpPr/>
-          <p:nvPr/>
-        </p:nvSpPr>
-        <p:spPr>
-          <a:xfrm>
-            <a:off x="2496312" y="3246120"/>
-            <a:ext cx="1920240" cy="384048"/>
+          <p:cNvPr id="21" name="Text 19"/>
+          <p:cNvSpPr/>
+          <p:nvPr/>
+        </p:nvSpPr>
+        <p:spPr>
+          <a:xfrm>
+            <a:off x="2496312" y="3401568"/>
+            <a:ext cx="1920240" cy="365760"/>
           </a:xfrm>
           <a:prstGeom prst="rect">
             <a:avLst/>
@@ -11285,14 +11232,14 @@
       </p:sp>
       <p:sp>
         <p:nvSpPr>
-          <p:cNvPr id="20" name="Text 18"/>
-          <p:cNvSpPr/>
-          <p:nvPr/>
-        </p:nvSpPr>
-        <p:spPr>
-          <a:xfrm>
-            <a:off x="2496312" y="3685032"/>
-            <a:ext cx="1920240" cy="274320"/>
+          <p:cNvPr id="22" name="Text 20"/>
+          <p:cNvSpPr/>
+          <p:nvPr/>
+        </p:nvSpPr>
+        <p:spPr>
+          <a:xfrm>
+            <a:off x="2496312" y="3813048"/>
+            <a:ext cx="1920240" cy="256032"/>
           </a:xfrm>
           <a:prstGeom prst="rect">
             <a:avLst/>
@@ -11321,14 +11268,14 @@
       </p:sp>
       <p:sp>
         <p:nvSpPr>
-          <p:cNvPr id="21" name="Text 19"/>
-          <p:cNvSpPr/>
-          <p:nvPr/>
-        </p:nvSpPr>
-        <p:spPr>
-          <a:xfrm>
-            <a:off x="2587752" y="4023360"/>
-            <a:ext cx="1737360" cy="384048"/>
+          <p:cNvPr id="23" name="Text 21"/>
+          <p:cNvSpPr/>
+          <p:nvPr/>
+        </p:nvSpPr>
+        <p:spPr>
+          <a:xfrm>
+            <a:off x="2587752" y="4133088"/>
+            <a:ext cx="1737360" cy="347472"/>
           </a:xfrm>
           <a:prstGeom prst="rect">
             <a:avLst/>
@@ -11357,14 +11304,14 @@
       </p:sp>
       <p:sp>
         <p:nvSpPr>
-          <p:cNvPr id="22" name="Shape 20"/>
-          <p:cNvSpPr/>
-          <p:nvPr/>
-        </p:nvSpPr>
-        <p:spPr>
-          <a:xfrm>
-            <a:off x="4572000" y="2011680"/>
-            <a:ext cx="0" cy="1234440"/>
+          <p:cNvPr id="24" name="Shape 22"/>
+          <p:cNvSpPr/>
+          <p:nvPr/>
+        </p:nvSpPr>
+        <p:spPr>
+          <a:xfrm>
+            <a:off x="4572000" y="2322576"/>
+            <a:ext cx="0" cy="1078992"/>
           </a:xfrm>
           <a:prstGeom prst="line">
             <a:avLst/>
@@ -11380,14 +11327,14 @@
       </p:sp>
       <p:sp>
         <p:nvSpPr>
-          <p:cNvPr id="23" name="Shape 21"/>
-          <p:cNvSpPr/>
-          <p:nvPr/>
-        </p:nvSpPr>
-        <p:spPr>
-          <a:xfrm>
-            <a:off x="5586984" y="3246120"/>
-            <a:ext cx="0" cy="-914400"/>
+          <p:cNvPr id="25" name="Shape 23"/>
+          <p:cNvSpPr/>
+          <p:nvPr/>
+        </p:nvSpPr>
+        <p:spPr>
+          <a:xfrm>
+            <a:off x="5586984" y="3401568"/>
+            <a:ext cx="0" cy="-777240"/>
           </a:xfrm>
           <a:prstGeom prst="line">
             <a:avLst/>
@@ -11403,14 +11350,14 @@
       </p:sp>
       <p:sp>
         <p:nvSpPr>
-          <p:cNvPr id="24" name="Shape 22"/>
-          <p:cNvSpPr/>
-          <p:nvPr/>
-        </p:nvSpPr>
-        <p:spPr>
-          <a:xfrm>
-            <a:off x="4672584" y="3246120"/>
-            <a:ext cx="1920240" cy="1280160"/>
+          <p:cNvPr id="26" name="Shape 24"/>
+          <p:cNvSpPr/>
+          <p:nvPr/>
+        </p:nvSpPr>
+        <p:spPr>
+          <a:xfrm>
+            <a:off x="4672584" y="3401568"/>
+            <a:ext cx="1920240" cy="1170432"/>
           </a:xfrm>
           <a:prstGeom prst="rect">
             <a:avLst/>
@@ -11430,14 +11377,14 @@
       </p:sp>
       <p:sp>
         <p:nvSpPr>
-          <p:cNvPr id="25" name="Shape 23"/>
-          <p:cNvSpPr/>
-          <p:nvPr/>
-        </p:nvSpPr>
-        <p:spPr>
-          <a:xfrm>
-            <a:off x="4672584" y="3246120"/>
-            <a:ext cx="1920240" cy="384048"/>
+          <p:cNvPr id="27" name="Shape 25"/>
+          <p:cNvSpPr/>
+          <p:nvPr/>
+        </p:nvSpPr>
+        <p:spPr>
+          <a:xfrm>
+            <a:off x="4672584" y="3401568"/>
+            <a:ext cx="1920240" cy="365760"/>
           </a:xfrm>
           <a:prstGeom prst="rect">
             <a:avLst/>
@@ -11450,14 +11397,14 @@
       </p:sp>
       <p:sp>
         <p:nvSpPr>
-          <p:cNvPr id="26" name="Text 24"/>
-          <p:cNvSpPr/>
-          <p:nvPr/>
-        </p:nvSpPr>
-        <p:spPr>
-          <a:xfrm>
-            <a:off x="4672584" y="3246120"/>
-            <a:ext cx="1920240" cy="384048"/>
+          <p:cNvPr id="28" name="Text 26"/>
+          <p:cNvSpPr/>
+          <p:nvPr/>
+        </p:nvSpPr>
+        <p:spPr>
+          <a:xfrm>
+            <a:off x="4672584" y="3401568"/>
+            <a:ext cx="1920240" cy="365760"/>
           </a:xfrm>
           <a:prstGeom prst="rect">
             <a:avLst/>
@@ -11486,14 +11433,14 @@
       </p:sp>
       <p:sp>
         <p:nvSpPr>
-          <p:cNvPr id="27" name="Text 25"/>
-          <p:cNvSpPr/>
-          <p:nvPr/>
-        </p:nvSpPr>
-        <p:spPr>
-          <a:xfrm>
-            <a:off x="4672584" y="3685032"/>
-            <a:ext cx="1920240" cy="274320"/>
+          <p:cNvPr id="29" name="Text 27"/>
+          <p:cNvSpPr/>
+          <p:nvPr/>
+        </p:nvSpPr>
+        <p:spPr>
+          <a:xfrm>
+            <a:off x="4672584" y="3813048"/>
+            <a:ext cx="1920240" cy="256032"/>
           </a:xfrm>
           <a:prstGeom prst="rect">
             <a:avLst/>
@@ -11522,14 +11469,14 @@
       </p:sp>
       <p:sp>
         <p:nvSpPr>
-          <p:cNvPr id="28" name="Text 26"/>
-          <p:cNvSpPr/>
-          <p:nvPr/>
-        </p:nvSpPr>
-        <p:spPr>
-          <a:xfrm>
-            <a:off x="4764024" y="4023360"/>
-            <a:ext cx="1737360" cy="384048"/>
+          <p:cNvPr id="30" name="Text 28"/>
+          <p:cNvSpPr/>
+          <p:nvPr/>
+        </p:nvSpPr>
+        <p:spPr>
+          <a:xfrm>
+            <a:off x="4764024" y="4133088"/>
+            <a:ext cx="1737360" cy="347472"/>
           </a:xfrm>
           <a:prstGeom prst="rect">
             <a:avLst/>
@@ -11558,14 +11505,14 @@
       </p:sp>
       <p:sp>
         <p:nvSpPr>
-          <p:cNvPr id="29" name="Shape 27"/>
-          <p:cNvSpPr/>
-          <p:nvPr/>
-        </p:nvSpPr>
-        <p:spPr>
-          <a:xfrm>
-            <a:off x="4572000" y="2011680"/>
-            <a:ext cx="0" cy="1234440"/>
+          <p:cNvPr id="31" name="Shape 29"/>
+          <p:cNvSpPr/>
+          <p:nvPr/>
+        </p:nvSpPr>
+        <p:spPr>
+          <a:xfrm>
+            <a:off x="4572000" y="2322576"/>
+            <a:ext cx="0" cy="1078992"/>
           </a:xfrm>
           <a:prstGeom prst="line">
             <a:avLst/>
@@ -11581,14 +11528,14 @@
       </p:sp>
       <p:sp>
         <p:nvSpPr>
-          <p:cNvPr id="30" name="Shape 28"/>
-          <p:cNvSpPr/>
-          <p:nvPr/>
-        </p:nvSpPr>
-        <p:spPr>
-          <a:xfrm>
-            <a:off x="7763256" y="3246120"/>
-            <a:ext cx="0" cy="-914400"/>
+          <p:cNvPr id="32" name="Shape 30"/>
+          <p:cNvSpPr/>
+          <p:nvPr/>
+        </p:nvSpPr>
+        <p:spPr>
+          <a:xfrm>
+            <a:off x="7763256" y="3401568"/>
+            <a:ext cx="0" cy="-777240"/>
           </a:xfrm>
           <a:prstGeom prst="line">
             <a:avLst/>
@@ -11604,14 +11551,14 @@
       </p:sp>
       <p:sp>
         <p:nvSpPr>
-          <p:cNvPr id="31" name="Shape 29"/>
-          <p:cNvSpPr/>
-          <p:nvPr/>
-        </p:nvSpPr>
-        <p:spPr>
-          <a:xfrm>
-            <a:off x="6848856" y="3246120"/>
-            <a:ext cx="1920240" cy="1280160"/>
+          <p:cNvPr id="33" name="Shape 31"/>
+          <p:cNvSpPr/>
+          <p:nvPr/>
+        </p:nvSpPr>
+        <p:spPr>
+          <a:xfrm>
+            <a:off x="6848856" y="3401568"/>
+            <a:ext cx="1920240" cy="1170432"/>
           </a:xfrm>
           <a:prstGeom prst="rect">
             <a:avLst/>
@@ -11631,14 +11578,14 @@
       </p:sp>
       <p:sp>
         <p:nvSpPr>
-          <p:cNvPr id="32" name="Shape 30"/>
-          <p:cNvSpPr/>
-          <p:nvPr/>
-        </p:nvSpPr>
-        <p:spPr>
-          <a:xfrm>
-            <a:off x="6848856" y="3246120"/>
-            <a:ext cx="1920240" cy="384048"/>
+          <p:cNvPr id="34" name="Shape 32"/>
+          <p:cNvSpPr/>
+          <p:nvPr/>
+        </p:nvSpPr>
+        <p:spPr>
+          <a:xfrm>
+            <a:off x="6848856" y="3401568"/>
+            <a:ext cx="1920240" cy="365760"/>
           </a:xfrm>
           <a:prstGeom prst="rect">
             <a:avLst/>
@@ -11651,14 +11598,14 @@
       </p:sp>
       <p:sp>
         <p:nvSpPr>
-          <p:cNvPr id="33" name="Text 31"/>
-          <p:cNvSpPr/>
-          <p:nvPr/>
-        </p:nvSpPr>
-        <p:spPr>
-          <a:xfrm>
-            <a:off x="6848856" y="3246120"/>
-            <a:ext cx="1920240" cy="384048"/>
+          <p:cNvPr id="35" name="Text 33"/>
+          <p:cNvSpPr/>
+          <p:nvPr/>
+        </p:nvSpPr>
+        <p:spPr>
+          <a:xfrm>
+            <a:off x="6848856" y="3401568"/>
+            <a:ext cx="1920240" cy="365760"/>
           </a:xfrm>
           <a:prstGeom prst="rect">
             <a:avLst/>
@@ -11687,14 +11634,14 @@
       </p:sp>
       <p:sp>
         <p:nvSpPr>
-          <p:cNvPr id="34" name="Text 32"/>
-          <p:cNvSpPr/>
-          <p:nvPr/>
-        </p:nvSpPr>
-        <p:spPr>
-          <a:xfrm>
-            <a:off x="6848856" y="3685032"/>
-            <a:ext cx="1920240" cy="274320"/>
+          <p:cNvPr id="36" name="Text 34"/>
+          <p:cNvSpPr/>
+          <p:nvPr/>
+        </p:nvSpPr>
+        <p:spPr>
+          <a:xfrm>
+            <a:off x="6848856" y="3813048"/>
+            <a:ext cx="1920240" cy="256032"/>
           </a:xfrm>
           <a:prstGeom prst="rect">
             <a:avLst/>
@@ -11723,14 +11670,14 @@
       </p:sp>
       <p:sp>
         <p:nvSpPr>
-          <p:cNvPr id="35" name="Text 33"/>
-          <p:cNvSpPr/>
-          <p:nvPr/>
-        </p:nvSpPr>
-        <p:spPr>
-          <a:xfrm>
-            <a:off x="6940296" y="4023360"/>
-            <a:ext cx="1737360" cy="384048"/>
+          <p:cNvPr id="37" name="Text 35"/>
+          <p:cNvSpPr/>
+          <p:nvPr/>
+        </p:nvSpPr>
+        <p:spPr>
+          <a:xfrm>
+            <a:off x="6940296" y="4133088"/>
+            <a:ext cx="1737360" cy="347472"/>
           </a:xfrm>
           <a:prstGeom prst="rect">
             <a:avLst/>
@@ -11759,14 +11706,14 @@
       </p:sp>
       <p:sp>
         <p:nvSpPr>
-          <p:cNvPr id="36" name="Shape 34"/>
-          <p:cNvSpPr/>
-          <p:nvPr/>
-        </p:nvSpPr>
-        <p:spPr>
-          <a:xfrm>
-            <a:off x="320040" y="4645152"/>
-            <a:ext cx="2697480" cy="384048"/>
+          <p:cNvPr id="38" name="Shape 36"/>
+          <p:cNvSpPr/>
+          <p:nvPr/>
+        </p:nvSpPr>
+        <p:spPr>
+          <a:xfrm>
+            <a:off x="320040" y="4681728"/>
+            <a:ext cx="2697480" cy="347472"/>
           </a:xfrm>
           <a:prstGeom prst="rect">
             <a:avLst/>
@@ -11779,14 +11726,14 @@
       </p:sp>
       <p:sp>
         <p:nvSpPr>
-          <p:cNvPr id="37" name="Text 35"/>
-          <p:cNvSpPr/>
-          <p:nvPr/>
-        </p:nvSpPr>
-        <p:spPr>
-          <a:xfrm>
-            <a:off x="411480" y="4645152"/>
-            <a:ext cx="2514600" cy="384048"/>
+          <p:cNvPr id="39" name="Text 37"/>
+          <p:cNvSpPr/>
+          <p:nvPr/>
+        </p:nvSpPr>
+        <p:spPr>
+          <a:xfrm>
+            <a:off x="411480" y="4681728"/>
+            <a:ext cx="2514600" cy="347472"/>
           </a:xfrm>
           <a:prstGeom prst="rect">
             <a:avLst/>
@@ -11815,14 +11762,14 @@
       </p:sp>
       <p:sp>
         <p:nvSpPr>
-          <p:cNvPr id="38" name="Shape 36"/>
-          <p:cNvSpPr/>
-          <p:nvPr/>
-        </p:nvSpPr>
-        <p:spPr>
-          <a:xfrm>
-            <a:off x="3200400" y="4645152"/>
-            <a:ext cx="2697480" cy="384048"/>
+          <p:cNvPr id="40" name="Shape 38"/>
+          <p:cNvSpPr/>
+          <p:nvPr/>
+        </p:nvSpPr>
+        <p:spPr>
+          <a:xfrm>
+            <a:off x="3200400" y="4681728"/>
+            <a:ext cx="2697480" cy="347472"/>
           </a:xfrm>
           <a:prstGeom prst="rect">
             <a:avLst/>
@@ -11835,14 +11782,14 @@
       </p:sp>
       <p:sp>
         <p:nvSpPr>
-          <p:cNvPr id="39" name="Text 37"/>
-          <p:cNvSpPr/>
-          <p:nvPr/>
-        </p:nvSpPr>
-        <p:spPr>
-          <a:xfrm>
-            <a:off x="3291840" y="4645152"/>
-            <a:ext cx="2514600" cy="384048"/>
+          <p:cNvPr id="41" name="Text 39"/>
+          <p:cNvSpPr/>
+          <p:nvPr/>
+        </p:nvSpPr>
+        <p:spPr>
+          <a:xfrm>
+            <a:off x="3291840" y="4681728"/>
+            <a:ext cx="2514600" cy="347472"/>
           </a:xfrm>
           <a:prstGeom prst="rect">
             <a:avLst/>
@@ -11871,14 +11818,14 @@
       </p:sp>
       <p:sp>
         <p:nvSpPr>
-          <p:cNvPr id="40" name="Shape 38"/>
-          <p:cNvSpPr/>
-          <p:nvPr/>
-        </p:nvSpPr>
-        <p:spPr>
-          <a:xfrm>
-            <a:off x="6080760" y="4645152"/>
-            <a:ext cx="2697480" cy="384048"/>
+          <p:cNvPr id="42" name="Shape 40"/>
+          <p:cNvSpPr/>
+          <p:nvPr/>
+        </p:nvSpPr>
+        <p:spPr>
+          <a:xfrm>
+            <a:off x="6080760" y="4681728"/>
+            <a:ext cx="2697480" cy="347472"/>
           </a:xfrm>
           <a:prstGeom prst="rect">
             <a:avLst/>
@@ -11891,14 +11838,14 @@
       </p:sp>
       <p:sp>
         <p:nvSpPr>
-          <p:cNvPr id="41" name="Text 39"/>
-          <p:cNvSpPr/>
-          <p:nvPr/>
-        </p:nvSpPr>
-        <p:spPr>
-          <a:xfrm>
-            <a:off x="6172200" y="4645152"/>
-            <a:ext cx="2514600" cy="384048"/>
+          <p:cNvPr id="43" name="Text 41"/>
+          <p:cNvSpPr/>
+          <p:nvPr/>
+        </p:nvSpPr>
+        <p:spPr>
+          <a:xfrm>
+            <a:off x="6172200" y="4681728"/>
+            <a:ext cx="2514600" cy="347472"/>
           </a:xfrm>
           <a:prstGeom prst="rect">
             <a:avLst/>

--- a/slides/Module_02_Core_Concepts.pptx
+++ b/slides/Module_02_Core_Concepts.pptx
@@ -3423,7 +3423,7 @@
                   <a:srgbClr val="5B8DB8"/>
                 </a:solidFill>
               </a:rPr>
-              <a:t>Understanding these patterns helps you reason about Claude Code behaviour and design production systems when the time comes.</a:t>
+              <a:t>Understanding these patterns helps you reason about Claude Code behavior and design production systems when the time comes.</a:t>
             </a:r>
             <a:endParaRPr lang="en-US" sz="950" dirty="0"/>
           </a:p>
@@ -15565,7 +15565,7 @@
                   <a:srgbClr val="7A90A8"/>
                 </a:solidFill>
               </a:rPr>
-              <a:t>Tight context = predictable behaviour</a:t>
+              <a:t>Tight context = predictable behavior</a:t>
             </a:r>
             <a:endParaRPr lang="en-US" sz="950" dirty="0"/>
           </a:p>
